--- a/Documents/Mock Presentaion.pptx
+++ b/Documents/Mock Presentaion.pptx
@@ -5,7 +5,7 @@
     <p:sldMasterId id="2147483684" r:id="rId1"/>
   </p:sldMasterIdLst>
   <p:notesMasterIdLst>
-    <p:notesMasterId r:id="rId50"/>
+    <p:notesMasterId r:id="rId51"/>
   </p:notesMasterIdLst>
   <p:sldIdLst>
     <p:sldId id="256" r:id="rId2"/>
@@ -35,27 +35,28 @@
     <p:sldId id="307" r:id="rId26"/>
     <p:sldId id="308" r:id="rId27"/>
     <p:sldId id="309" r:id="rId28"/>
-    <p:sldId id="310" r:id="rId29"/>
-    <p:sldId id="311" r:id="rId30"/>
-    <p:sldId id="312" r:id="rId31"/>
-    <p:sldId id="313" r:id="rId32"/>
-    <p:sldId id="314" r:id="rId33"/>
-    <p:sldId id="315" r:id="rId34"/>
-    <p:sldId id="316" r:id="rId35"/>
-    <p:sldId id="317" r:id="rId36"/>
-    <p:sldId id="318" r:id="rId37"/>
-    <p:sldId id="319" r:id="rId38"/>
-    <p:sldId id="320" r:id="rId39"/>
-    <p:sldId id="321" r:id="rId40"/>
-    <p:sldId id="322" r:id="rId41"/>
-    <p:sldId id="323" r:id="rId42"/>
-    <p:sldId id="324" r:id="rId43"/>
-    <p:sldId id="325" r:id="rId44"/>
-    <p:sldId id="326" r:id="rId45"/>
-    <p:sldId id="285" r:id="rId46"/>
-    <p:sldId id="274" r:id="rId47"/>
-    <p:sldId id="283" r:id="rId48"/>
-    <p:sldId id="275" r:id="rId49"/>
+    <p:sldId id="327" r:id="rId29"/>
+    <p:sldId id="310" r:id="rId30"/>
+    <p:sldId id="311" r:id="rId31"/>
+    <p:sldId id="312" r:id="rId32"/>
+    <p:sldId id="313" r:id="rId33"/>
+    <p:sldId id="314" r:id="rId34"/>
+    <p:sldId id="315" r:id="rId35"/>
+    <p:sldId id="316" r:id="rId36"/>
+    <p:sldId id="317" r:id="rId37"/>
+    <p:sldId id="318" r:id="rId38"/>
+    <p:sldId id="319" r:id="rId39"/>
+    <p:sldId id="320" r:id="rId40"/>
+    <p:sldId id="321" r:id="rId41"/>
+    <p:sldId id="322" r:id="rId42"/>
+    <p:sldId id="323" r:id="rId43"/>
+    <p:sldId id="324" r:id="rId44"/>
+    <p:sldId id="325" r:id="rId45"/>
+    <p:sldId id="326" r:id="rId46"/>
+    <p:sldId id="285" r:id="rId47"/>
+    <p:sldId id="274" r:id="rId48"/>
+    <p:sldId id="283" r:id="rId49"/>
+    <p:sldId id="275" r:id="rId50"/>
   </p:sldIdLst>
   <p:sldSz cx="12192000" cy="6858000"/>
   <p:notesSz cx="6858000" cy="9144000"/>
@@ -256,7 +257,7 @@
             <a:fld id="{665A85DC-018B-4F1D-9BCC-BA10FDA96A23}" type="datetimeFigureOut">
               <a:rPr lang="en-US" smtClean="0"/>
               <a:pPr/>
-              <a:t>5/18/2026</a:t>
+              <a:t>5/26/2026</a:t>
             </a:fld>
             <a:endParaRPr lang="en-US"/>
           </a:p>
@@ -701,7 +702,7 @@
             <a:fld id="{32E4B66D-A5CE-42A1-9C05-46FA3E94CC3F}" type="datetime2">
               <a:rPr lang="en-US" smtClean="0"/>
               <a:pPr/>
-              <a:t>Monday, May 18, 2026</a:t>
+              <a:t>Tuesday, May 26, 2026</a:t>
             </a:fld>
             <a:endParaRPr lang="en-US"/>
           </a:p>
@@ -866,7 +867,7 @@
             <a:fld id="{4AD28D4A-0135-440A-97ED-D0FA805DB767}" type="datetime2">
               <a:rPr lang="en-US" smtClean="0"/>
               <a:pPr/>
-              <a:t>Monday, May 18, 2026</a:t>
+              <a:t>Tuesday, May 26, 2026</a:t>
             </a:fld>
             <a:endParaRPr lang="en-US"/>
           </a:p>
@@ -1041,7 +1042,7 @@
             <a:fld id="{C5CE3F86-EE01-4EA4-B63B-715E83139625}" type="datetime2">
               <a:rPr lang="en-US" smtClean="0"/>
               <a:pPr/>
-              <a:t>Monday, May 18, 2026</a:t>
+              <a:t>Tuesday, May 26, 2026</a:t>
             </a:fld>
             <a:endParaRPr lang="en-US"/>
           </a:p>
@@ -1206,7 +1207,7 @@
             <a:fld id="{9573516B-352B-4793-B7C4-6C06A4F4800D}" type="datetime2">
               <a:rPr lang="en-US" smtClean="0"/>
               <a:pPr/>
-              <a:t>Monday, May 18, 2026</a:t>
+              <a:t>Tuesday, May 26, 2026</a:t>
             </a:fld>
             <a:endParaRPr lang="en-US"/>
           </a:p>
@@ -1448,7 +1449,7 @@
             <a:fld id="{FB36EF37-A94C-4534-A2B1-CC2022CDC647}" type="datetime2">
               <a:rPr lang="en-US" smtClean="0"/>
               <a:pPr/>
-              <a:t>Monday, May 18, 2026</a:t>
+              <a:t>Tuesday, May 26, 2026</a:t>
             </a:fld>
             <a:endParaRPr lang="en-US"/>
           </a:p>
@@ -1730,7 +1731,7 @@
             <a:fld id="{0FF423B4-94AB-4286-8811-583146B7BAD5}" type="datetime2">
               <a:rPr lang="en-US" smtClean="0"/>
               <a:pPr/>
-              <a:t>Monday, May 18, 2026</a:t>
+              <a:t>Tuesday, May 26, 2026</a:t>
             </a:fld>
             <a:endParaRPr lang="en-US"/>
           </a:p>
@@ -2146,7 +2147,7 @@
             <a:fld id="{DA8A0EDA-E9E5-48B8-905D-8AC44EBBC9FD}" type="datetime2">
               <a:rPr lang="en-US" smtClean="0"/>
               <a:pPr/>
-              <a:t>Monday, May 18, 2026</a:t>
+              <a:t>Tuesday, May 26, 2026</a:t>
             </a:fld>
             <a:endParaRPr lang="en-US"/>
           </a:p>
@@ -2260,7 +2261,7 @@
             <a:fld id="{1D950185-9017-4836-A92F-BB05BFBC62F1}" type="datetime2">
               <a:rPr lang="en-US" smtClean="0"/>
               <a:pPr/>
-              <a:t>Monday, May 18, 2026</a:t>
+              <a:t>Tuesday, May 26, 2026</a:t>
             </a:fld>
             <a:endParaRPr lang="en-US"/>
           </a:p>
@@ -2352,7 +2353,7 @@
             <a:fld id="{9CC0F54A-25BC-482D-8D56-0755565FF8F0}" type="datetime2">
               <a:rPr lang="en-US" smtClean="0"/>
               <a:pPr/>
-              <a:t>Monday, May 18, 2026</a:t>
+              <a:t>Tuesday, May 26, 2026</a:t>
             </a:fld>
             <a:endParaRPr lang="en-US"/>
           </a:p>
@@ -2624,7 +2625,7 @@
             <a:fld id="{B3DAC85E-12E0-4562-8829-CBECA72C9894}" type="datetime2">
               <a:rPr lang="en-US" smtClean="0"/>
               <a:pPr/>
-              <a:t>Monday, May 18, 2026</a:t>
+              <a:t>Tuesday, May 26, 2026</a:t>
             </a:fld>
             <a:endParaRPr lang="en-US"/>
           </a:p>
@@ -2873,7 +2874,7 @@
             <a:fld id="{2CD00E6C-C80E-4CD4-82EA-A20BF1A29307}" type="datetime2">
               <a:rPr lang="en-US" smtClean="0"/>
               <a:pPr/>
-              <a:t>Monday, May 18, 2026</a:t>
+              <a:t>Tuesday, May 26, 2026</a:t>
             </a:fld>
             <a:endParaRPr lang="en-US"/>
           </a:p>
@@ -3081,7 +3082,7 @@
             <a:fld id="{283F5DE8-46B7-43C6-92B6-780BCD9A2D43}" type="datetime2">
               <a:rPr lang="en-US" smtClean="0"/>
               <a:pPr/>
-              <a:t>Monday, May 18, 2026</a:t>
+              <a:t>Tuesday, May 26, 2026</a:t>
             </a:fld>
             <a:endParaRPr lang="en-US"/>
           </a:p>
@@ -12241,6 +12242,89 @@
   <p:cSld>
     <p:spTree>
       <p:nvGrpSpPr>
+        <p:cNvPr id="1" name=""/>
+        <p:cNvGrpSpPr/>
+        <p:nvPr/>
+      </p:nvGrpSpPr>
+      <p:grpSpPr>
+        <a:xfrm>
+          <a:off x="0" y="0"/>
+          <a:ext cx="0" cy="0"/>
+          <a:chOff x="0" y="0"/>
+          <a:chExt cx="0" cy="0"/>
+        </a:xfrm>
+      </p:grpSpPr>
+      <p:sp>
+        <p:nvSpPr>
+          <p:cNvPr id="2" name="Title 1">
+            <a:extLst>
+              <a:ext uri="{FF2B5EF4-FFF2-40B4-BE49-F238E27FC236}">
+                <a16:creationId xmlns:a16="http://schemas.microsoft.com/office/drawing/2014/main" id="{A3E0B2F3-3CED-18F8-FCD7-1D553AE3257E}"/>
+              </a:ext>
+            </a:extLst>
+          </p:cNvPr>
+          <p:cNvSpPr>
+            <a:spLocks noGrp="1"/>
+          </p:cNvSpPr>
+          <p:nvPr>
+            <p:ph type="title"/>
+          </p:nvPr>
+        </p:nvSpPr>
+        <p:spPr>
+          <a:xfrm>
+            <a:off x="609600" y="2857500"/>
+            <a:ext cx="10972800" cy="1143000"/>
+          </a:xfrm>
+        </p:spPr>
+        <p:txBody>
+          <a:bodyPr>
+            <a:normAutofit fontScale="90000"/>
+          </a:bodyPr>
+          <a:lstStyle/>
+          <a:p>
+            <a:r>
+              <a:rPr lang="en-US" b="1" dirty="0">
+                <a:solidFill>
+                  <a:schemeClr val="tx1">
+                    <a:lumMod val="95000"/>
+                    <a:lumOff val="5000"/>
+                  </a:schemeClr>
+                </a:solidFill>
+              </a:rPr>
+              <a:t>Class Diagram</a:t>
+            </a:r>
+            <a:br>
+              <a:rPr lang="en-US" b="1" dirty="0">
+                <a:solidFill>
+                  <a:schemeClr val="tx1">
+                    <a:lumMod val="95000"/>
+                    <a:lumOff val="5000"/>
+                  </a:schemeClr>
+                </a:solidFill>
+              </a:rPr>
+            </a:br>
+            <a:endParaRPr lang="en-US" dirty="0"/>
+          </a:p>
+        </p:txBody>
+      </p:sp>
+    </p:spTree>
+    <p:extLst>
+      <p:ext uri="{BB962C8B-B14F-4D97-AF65-F5344CB8AC3E}">
+        <p14:creationId xmlns:p14="http://schemas.microsoft.com/office/powerpoint/2010/main" val="711491534"/>
+      </p:ext>
+    </p:extLst>
+  </p:cSld>
+  <p:clrMapOvr>
+    <a:masterClrMapping/>
+  </p:clrMapOvr>
+</p:sld>
+</file>
+
+<file path=ppt/slides/slide29.xml><?xml version="1.0" encoding="utf-8"?>
+<p:sld xmlns:a="http://schemas.openxmlformats.org/drawingml/2006/main" xmlns:r="http://schemas.openxmlformats.org/officeDocument/2006/relationships" xmlns:p="http://schemas.openxmlformats.org/presentationml/2006/main">
+  <p:cSld>
+    <p:spTree>
+      <p:nvGrpSpPr>
         <p:cNvPr id="1" name="">
           <a:extLst>
             <a:ext uri="{FF2B5EF4-FFF2-40B4-BE49-F238E27FC236}">
@@ -12378,7 +12462,7 @@
               <a:pPr algn="r">
                 <a:defRPr/>
               </a:pPr>
-              <a:t>28</a:t>
+              <a:t>29</a:t>
             </a:fld>
             <a:endParaRPr lang="en-US" sz="1200" dirty="0">
               <a:latin typeface="Rockwell" pitchFamily="18" charset="0"/>
@@ -12386,45 +12470,6 @@
           </a:p>
         </p:txBody>
       </p:sp>
-      <p:pic>
-        <p:nvPicPr>
-          <p:cNvPr id="10" name="Picture 4">
-            <a:extLst>
-              <a:ext uri="{FF2B5EF4-FFF2-40B4-BE49-F238E27FC236}">
-                <a16:creationId xmlns:a16="http://schemas.microsoft.com/office/drawing/2014/main" id="{9620A2E0-85B3-DDB8-EAFE-37B5FEB13F9E}"/>
-              </a:ext>
-            </a:extLst>
-          </p:cNvPr>
-          <p:cNvPicPr>
-            <a:picLocks noChangeAspect="1" noChangeArrowheads="1"/>
-          </p:cNvPicPr>
-          <p:nvPr/>
-        </p:nvPicPr>
-        <p:blipFill>
-          <a:blip r:embed="rId2"/>
-          <a:srcRect/>
-          <a:stretch>
-            <a:fillRect/>
-          </a:stretch>
-        </p:blipFill>
-        <p:spPr bwMode="auto">
-          <a:xfrm>
-            <a:off x="533400" y="91480"/>
-            <a:ext cx="609600" cy="539014"/>
-          </a:xfrm>
-          <a:prstGeom prst="rect">
-            <a:avLst/>
-          </a:prstGeom>
-          <a:noFill/>
-          <a:ln w="9525">
-            <a:noFill/>
-            <a:miter lim="800000"/>
-            <a:headEnd/>
-            <a:tailEnd/>
-          </a:ln>
-          <a:effectLst/>
-        </p:spPr>
-      </p:pic>
       <p:sp>
         <p:nvSpPr>
           <p:cNvPr id="12" name="Title 1">
@@ -12460,62 +12505,20 @@
               </a:spcBef>
               <a:defRPr/>
             </a:pPr>
-            <a:r>
-              <a:rPr lang="en-US" sz="3200" b="1" dirty="0">
-                <a:solidFill>
-                  <a:schemeClr val="tx1">
-                    <a:lumMod val="95000"/>
-                    <a:lumOff val="5000"/>
-                  </a:schemeClr>
-                </a:solidFill>
-                <a:latin typeface="+mj-lt"/>
-                <a:ea typeface="+mj-ea"/>
-                <a:cs typeface="+mj-cs"/>
-              </a:rPr>
-              <a:t>Class Diagram</a:t>
-            </a:r>
-          </a:p>
-        </p:txBody>
-      </p:sp>
-      <p:pic>
-        <p:nvPicPr>
-          <p:cNvPr id="11" name="Picture 2">
-            <a:extLst>
-              <a:ext uri="{FF2B5EF4-FFF2-40B4-BE49-F238E27FC236}">
-                <a16:creationId xmlns:a16="http://schemas.microsoft.com/office/drawing/2014/main" id="{427B92D3-5DF4-6132-4167-646542495EA9}"/>
-              </a:ext>
-            </a:extLst>
-          </p:cNvPr>
-          <p:cNvPicPr>
-            <a:picLocks noChangeAspect="1" noChangeArrowheads="1"/>
-          </p:cNvPicPr>
-          <p:nvPr/>
-        </p:nvPicPr>
-        <p:blipFill>
-          <a:blip r:embed="rId3" cstate="print"/>
-          <a:srcRect/>
-          <a:stretch>
-            <a:fillRect/>
-          </a:stretch>
-        </p:blipFill>
-        <p:spPr bwMode="auto">
-          <a:xfrm>
-            <a:off x="11100459" y="122550"/>
-            <a:ext cx="483679" cy="506506"/>
-          </a:xfrm>
-          <a:prstGeom prst="rect">
-            <a:avLst/>
-          </a:prstGeom>
-          <a:noFill/>
-          <a:ln w="9525">
-            <a:noFill/>
-            <a:miter lim="800000"/>
-            <a:headEnd/>
-            <a:tailEnd/>
-          </a:ln>
-          <a:effectLst/>
-        </p:spPr>
-      </p:pic>
+            <a:endParaRPr lang="en-US" sz="3200" b="1" dirty="0">
+              <a:solidFill>
+                <a:schemeClr val="tx1">
+                  <a:lumMod val="95000"/>
+                  <a:lumOff val="5000"/>
+                </a:schemeClr>
+              </a:solidFill>
+              <a:latin typeface="+mj-lt"/>
+              <a:ea typeface="+mj-ea"/>
+              <a:cs typeface="+mj-cs"/>
+            </a:endParaRPr>
+          </a:p>
+        </p:txBody>
+      </p:sp>
       <p:sp>
         <p:nvSpPr>
           <p:cNvPr id="16" name="Slide Number Placeholder 3">
@@ -12612,21 +12615,20 @@
           <p:nvPr/>
         </p:nvPicPr>
         <p:blipFill>
-          <a:blip r:embed="rId4">
+          <a:blip r:embed="rId2">
             <a:extLst>
               <a:ext uri="{28A0092B-C50C-407E-A947-70E740481C1C}">
                 <a14:useLocalDpi xmlns:a14="http://schemas.microsoft.com/office/drawing/2010/main" val="0"/>
               </a:ext>
             </a:extLst>
           </a:blip>
-          <a:stretch>
-            <a:fillRect/>
-          </a:stretch>
+          <a:srcRect/>
+          <a:stretch/>
         </p:blipFill>
         <p:spPr>
           <a:xfrm>
-            <a:off x="886681" y="815216"/>
-            <a:ext cx="10034587" cy="4987903"/>
+            <a:off x="2971800" y="192494"/>
+            <a:ext cx="6529187" cy="5584018"/>
           </a:xfrm>
           <a:prstGeom prst="rect">
             <a:avLst/>
@@ -12637,416 +12639,6 @@
     <p:extLst>
       <p:ext uri="{BB962C8B-B14F-4D97-AF65-F5344CB8AC3E}">
         <p14:creationId xmlns:p14="http://schemas.microsoft.com/office/powerpoint/2010/main" val="3881041893"/>
-      </p:ext>
-    </p:extLst>
-  </p:cSld>
-  <p:clrMapOvr>
-    <a:masterClrMapping/>
-  </p:clrMapOvr>
-</p:sld>
-</file>
-
-<file path=ppt/slides/slide29.xml><?xml version="1.0" encoding="utf-8"?>
-<p:sld xmlns:a="http://schemas.openxmlformats.org/drawingml/2006/main" xmlns:r="http://schemas.openxmlformats.org/officeDocument/2006/relationships" xmlns:p="http://schemas.openxmlformats.org/presentationml/2006/main">
-  <p:cSld>
-    <p:spTree>
-      <p:nvGrpSpPr>
-        <p:cNvPr id="1" name="">
-          <a:extLst>
-            <a:ext uri="{FF2B5EF4-FFF2-40B4-BE49-F238E27FC236}">
-              <a16:creationId xmlns:a16="http://schemas.microsoft.com/office/drawing/2014/main" id="{A2D0AD59-F6B5-72B1-2094-2F7D9597232B}"/>
-            </a:ext>
-          </a:extLst>
-        </p:cNvPr>
-        <p:cNvGrpSpPr/>
-        <p:nvPr/>
-      </p:nvGrpSpPr>
-      <p:grpSpPr>
-        <a:xfrm>
-          <a:off x="0" y="0"/>
-          <a:ext cx="0" cy="0"/>
-          <a:chOff x="0" y="0"/>
-          <a:chExt cx="0" cy="0"/>
-        </a:xfrm>
-      </p:grpSpPr>
-      <p:sp>
-        <p:nvSpPr>
-          <p:cNvPr id="2" name="Title 1">
-            <a:extLst>
-              <a:ext uri="{FF2B5EF4-FFF2-40B4-BE49-F238E27FC236}">
-                <a16:creationId xmlns:a16="http://schemas.microsoft.com/office/drawing/2014/main" id="{920AF7D0-F83C-97FB-414D-D2F08180C6C4}"/>
-              </a:ext>
-            </a:extLst>
-          </p:cNvPr>
-          <p:cNvSpPr>
-            <a:spLocks noGrp="1"/>
-          </p:cNvSpPr>
-          <p:nvPr>
-            <p:ph type="title"/>
-          </p:nvPr>
-        </p:nvSpPr>
-        <p:spPr>
-          <a:xfrm>
-            <a:off x="2133600" y="171857"/>
-            <a:ext cx="7924800" cy="457201"/>
-          </a:xfrm>
-        </p:spPr>
-        <p:txBody>
-          <a:bodyPr>
-            <a:noAutofit/>
-          </a:bodyPr>
-          <a:lstStyle/>
-          <a:p>
-            <a:pPr algn="ctr"/>
-            <a:br>
-              <a:rPr lang="en-US" sz="3200" b="1" dirty="0"/>
-            </a:br>
-            <a:br>
-              <a:rPr lang="en-US" sz="3200" b="1" dirty="0"/>
-            </a:br>
-            <a:br>
-              <a:rPr lang="en-US" sz="3200" b="1" dirty="0"/>
-            </a:br>
-            <a:br>
-              <a:rPr lang="en-US" sz="3200" b="1" dirty="0"/>
-            </a:br>
-            <a:br>
-              <a:rPr lang="en-US" sz="3200" b="1" dirty="0"/>
-            </a:br>
-            <a:br>
-              <a:rPr lang="en-US" sz="3200" b="1" dirty="0"/>
-            </a:br>
-            <a:br>
-              <a:rPr lang="en-US" sz="3200" b="1" dirty="0"/>
-            </a:br>
-            <a:br>
-              <a:rPr lang="en-US" sz="3200" b="1" dirty="0"/>
-            </a:br>
-            <a:br>
-              <a:rPr lang="en-US" sz="3200" b="1" dirty="0"/>
-            </a:br>
-            <a:br>
-              <a:rPr lang="en-US" sz="3200" b="1" dirty="0"/>
-            </a:br>
-            <a:r>
-              <a:rPr lang="en-US" sz="3200" b="1" dirty="0"/>
-              <a:t>                     </a:t>
-            </a:r>
-            <a:br>
-              <a:rPr lang="en-US" sz="3200" b="1" dirty="0"/>
-            </a:br>
-            <a:br>
-              <a:rPr lang="en-US" sz="3200" b="1" dirty="0"/>
-            </a:br>
-            <a:br>
-              <a:rPr lang="en-US" sz="3200" b="1" dirty="0"/>
-            </a:br>
-            <a:br>
-              <a:rPr lang="en-US" sz="3200" b="1" dirty="0"/>
-            </a:br>
-            <a:br>
-              <a:rPr lang="en-US" sz="3200" b="1" dirty="0"/>
-            </a:br>
-            <a:endParaRPr lang="en-US" sz="3200" b="1" dirty="0"/>
-          </a:p>
-        </p:txBody>
-      </p:sp>
-      <p:sp>
-        <p:nvSpPr>
-          <p:cNvPr id="8" name="Slide Number Placeholder 3">
-            <a:extLst>
-              <a:ext uri="{FF2B5EF4-FFF2-40B4-BE49-F238E27FC236}">
-                <a16:creationId xmlns:a16="http://schemas.microsoft.com/office/drawing/2014/main" id="{9D687846-FAAB-0836-9251-6BBF40CE2F61}"/>
-              </a:ext>
-            </a:extLst>
-          </p:cNvPr>
-          <p:cNvSpPr txBox="1">
-            <a:spLocks/>
-          </p:cNvSpPr>
-          <p:nvPr/>
-        </p:nvSpPr>
-        <p:spPr>
-          <a:xfrm>
-            <a:off x="8534400" y="6629400"/>
-            <a:ext cx="2133600" cy="228600"/>
-          </a:xfrm>
-          <a:prstGeom prst="rect">
-            <a:avLst/>
-          </a:prstGeom>
-        </p:spPr>
-        <p:txBody>
-          <a:bodyPr vert="horz" lIns="91440" tIns="45720" rIns="91440" bIns="45720" rtlCol="0" anchor="ctr"/>
-          <a:lstStyle/>
-          <a:p>
-            <a:pPr algn="r">
-              <a:defRPr/>
-            </a:pPr>
-            <a:fld id="{B6F15528-21DE-4FAA-801E-634DDDAF4B2B}" type="slidenum">
-              <a:rPr lang="en-US" sz="1200">
-                <a:latin typeface="Rockwell" pitchFamily="18" charset="0"/>
-              </a:rPr>
-              <a:pPr algn="r">
-                <a:defRPr/>
-              </a:pPr>
-              <a:t>29</a:t>
-            </a:fld>
-            <a:endParaRPr lang="en-US" sz="1200" dirty="0">
-              <a:latin typeface="Rockwell" pitchFamily="18" charset="0"/>
-            </a:endParaRPr>
-          </a:p>
-        </p:txBody>
-      </p:sp>
-      <p:pic>
-        <p:nvPicPr>
-          <p:cNvPr id="10" name="Picture 4">
-            <a:extLst>
-              <a:ext uri="{FF2B5EF4-FFF2-40B4-BE49-F238E27FC236}">
-                <a16:creationId xmlns:a16="http://schemas.microsoft.com/office/drawing/2014/main" id="{C5D0B98D-3D49-9314-5AD6-ACA202F3DB8E}"/>
-              </a:ext>
-            </a:extLst>
-          </p:cNvPr>
-          <p:cNvPicPr>
-            <a:picLocks noChangeAspect="1" noChangeArrowheads="1"/>
-          </p:cNvPicPr>
-          <p:nvPr/>
-        </p:nvPicPr>
-        <p:blipFill>
-          <a:blip r:embed="rId2"/>
-          <a:srcRect/>
-          <a:stretch>
-            <a:fillRect/>
-          </a:stretch>
-        </p:blipFill>
-        <p:spPr bwMode="auto">
-          <a:xfrm>
-            <a:off x="533400" y="91480"/>
-            <a:ext cx="609600" cy="539014"/>
-          </a:xfrm>
-          <a:prstGeom prst="rect">
-            <a:avLst/>
-          </a:prstGeom>
-          <a:noFill/>
-          <a:ln w="9525">
-            <a:noFill/>
-            <a:miter lim="800000"/>
-            <a:headEnd/>
-            <a:tailEnd/>
-          </a:ln>
-          <a:effectLst/>
-        </p:spPr>
-      </p:pic>
-      <p:sp>
-        <p:nvSpPr>
-          <p:cNvPr id="12" name="Title 1">
-            <a:extLst>
-              <a:ext uri="{FF2B5EF4-FFF2-40B4-BE49-F238E27FC236}">
-                <a16:creationId xmlns:a16="http://schemas.microsoft.com/office/drawing/2014/main" id="{53C5790F-64DB-29DF-3E53-0D2B3644B43F}"/>
-              </a:ext>
-            </a:extLst>
-          </p:cNvPr>
-          <p:cNvSpPr txBox="1">
-            <a:spLocks/>
-          </p:cNvSpPr>
-          <p:nvPr/>
-        </p:nvSpPr>
-        <p:spPr>
-          <a:xfrm>
-            <a:off x="1880616" y="171856"/>
-            <a:ext cx="8046720" cy="457200"/>
-          </a:xfrm>
-          <a:prstGeom prst="rect">
-            <a:avLst/>
-          </a:prstGeom>
-        </p:spPr>
-        <p:txBody>
-          <a:bodyPr vert="horz" lIns="91440" tIns="45720" rIns="91440" bIns="45720" rtlCol="0" anchor="ctr">
-            <a:noAutofit/>
-          </a:bodyPr>
-          <a:lstStyle/>
-          <a:p>
-            <a:pPr algn="ctr">
-              <a:spcBef>
-                <a:spcPct val="0"/>
-              </a:spcBef>
-              <a:defRPr/>
-            </a:pPr>
-            <a:r>
-              <a:rPr lang="en-US" sz="3200" b="1" dirty="0">
-                <a:solidFill>
-                  <a:schemeClr val="tx1">
-                    <a:lumMod val="95000"/>
-                    <a:lumOff val="5000"/>
-                  </a:schemeClr>
-                </a:solidFill>
-                <a:latin typeface="+mj-lt"/>
-                <a:ea typeface="+mj-ea"/>
-                <a:cs typeface="+mj-cs"/>
-              </a:rPr>
-              <a:t>Data Flow Diagram</a:t>
-            </a:r>
-          </a:p>
-        </p:txBody>
-      </p:sp>
-      <p:pic>
-        <p:nvPicPr>
-          <p:cNvPr id="11" name="Picture 2">
-            <a:extLst>
-              <a:ext uri="{FF2B5EF4-FFF2-40B4-BE49-F238E27FC236}">
-                <a16:creationId xmlns:a16="http://schemas.microsoft.com/office/drawing/2014/main" id="{ACAE96B2-107F-FC13-6680-F7C5F0DE1587}"/>
-              </a:ext>
-            </a:extLst>
-          </p:cNvPr>
-          <p:cNvPicPr>
-            <a:picLocks noChangeAspect="1" noChangeArrowheads="1"/>
-          </p:cNvPicPr>
-          <p:nvPr/>
-        </p:nvPicPr>
-        <p:blipFill>
-          <a:blip r:embed="rId3" cstate="print"/>
-          <a:srcRect/>
-          <a:stretch>
-            <a:fillRect/>
-          </a:stretch>
-        </p:blipFill>
-        <p:spPr bwMode="auto">
-          <a:xfrm>
-            <a:off x="11100459" y="122550"/>
-            <a:ext cx="483679" cy="506506"/>
-          </a:xfrm>
-          <a:prstGeom prst="rect">
-            <a:avLst/>
-          </a:prstGeom>
-          <a:noFill/>
-          <a:ln w="9525">
-            <a:noFill/>
-            <a:miter lim="800000"/>
-            <a:headEnd/>
-            <a:tailEnd/>
-          </a:ln>
-          <a:effectLst/>
-        </p:spPr>
-      </p:pic>
-      <p:sp>
-        <p:nvSpPr>
-          <p:cNvPr id="16" name="Slide Number Placeholder 3">
-            <a:extLst>
-              <a:ext uri="{FF2B5EF4-FFF2-40B4-BE49-F238E27FC236}">
-                <a16:creationId xmlns:a16="http://schemas.microsoft.com/office/drawing/2014/main" id="{45107E22-3429-A654-6EE1-A4C2E4F457AC}"/>
-              </a:ext>
-            </a:extLst>
-          </p:cNvPr>
-          <p:cNvSpPr txBox="1">
-            <a:spLocks/>
-          </p:cNvSpPr>
-          <p:nvPr/>
-        </p:nvSpPr>
-        <p:spPr>
-          <a:xfrm>
-            <a:off x="2055875" y="6608708"/>
-            <a:ext cx="7696200" cy="228600"/>
-          </a:xfrm>
-          <a:prstGeom prst="rect">
-            <a:avLst/>
-          </a:prstGeom>
-        </p:spPr>
-        <p:txBody>
-          <a:bodyPr vert="horz" lIns="91440" tIns="45720" rIns="91440" bIns="45720" rtlCol="0" anchor="ctr"/>
-          <a:lstStyle/>
-          <a:p>
-            <a:pPr algn="ctr"/>
-            <a:r>
-              <a:rPr lang="en-US" sz="1200" b="1" dirty="0">
-                <a:latin typeface="Times New Roman" panose="02020603050405020304" pitchFamily="18" charset="0"/>
-                <a:cs typeface="Times New Roman" pitchFamily="18" charset="0"/>
-              </a:rPr>
-              <a:t>Smart Waste Management System (SWMS)</a:t>
-            </a:r>
-            <a:endParaRPr lang="en-US" sz="1200" dirty="0">
-              <a:latin typeface="Times New Roman" panose="02020603050405020304" pitchFamily="18" charset="0"/>
-              <a:cs typeface="Times New Roman" panose="02020603050405020304" pitchFamily="18" charset="0"/>
-            </a:endParaRPr>
-          </a:p>
-        </p:txBody>
-      </p:sp>
-      <p:sp>
-        <p:nvSpPr>
-          <p:cNvPr id="6" name="TextBox 5">
-            <a:extLst>
-              <a:ext uri="{FF2B5EF4-FFF2-40B4-BE49-F238E27FC236}">
-                <a16:creationId xmlns:a16="http://schemas.microsoft.com/office/drawing/2014/main" id="{EFAFAD74-8FB7-C544-01FA-C13BF7BC3BD6}"/>
-              </a:ext>
-            </a:extLst>
-          </p:cNvPr>
-          <p:cNvSpPr txBox="1"/>
-          <p:nvPr/>
-        </p:nvSpPr>
-        <p:spPr>
-          <a:xfrm>
-            <a:off x="5414563" y="4724400"/>
-            <a:ext cx="1362874" cy="276999"/>
-          </a:xfrm>
-          <a:prstGeom prst="rect">
-            <a:avLst/>
-          </a:prstGeom>
-          <a:noFill/>
-        </p:spPr>
-        <p:txBody>
-          <a:bodyPr wrap="none" rtlCol="0">
-            <a:spAutoFit/>
-          </a:bodyPr>
-          <a:lstStyle/>
-          <a:p>
-            <a:pPr algn="ctr"/>
-            <a:r>
-              <a:rPr lang="en-US" sz="1200" dirty="0">
-                <a:latin typeface="Times New Roman" panose="02020603050405020304" pitchFamily="18" charset="0"/>
-                <a:cs typeface="Times New Roman" panose="02020603050405020304" pitchFamily="18" charset="0"/>
-              </a:rPr>
-              <a:t>Figure 6.1 Level 0.</a:t>
-            </a:r>
-          </a:p>
-        </p:txBody>
-      </p:sp>
-      <p:pic>
-        <p:nvPicPr>
-          <p:cNvPr id="5" name="Picture 4">
-            <a:extLst>
-              <a:ext uri="{FF2B5EF4-FFF2-40B4-BE49-F238E27FC236}">
-                <a16:creationId xmlns:a16="http://schemas.microsoft.com/office/drawing/2014/main" id="{2362BA51-D0E5-4C58-2F2A-05D3E6F0A8A4}"/>
-              </a:ext>
-            </a:extLst>
-          </p:cNvPr>
-          <p:cNvPicPr>
-            <a:picLocks noChangeAspect="1"/>
-          </p:cNvPicPr>
-          <p:nvPr/>
-        </p:nvPicPr>
-        <p:blipFill>
-          <a:blip r:embed="rId4">
-            <a:extLst>
-              <a:ext uri="{28A0092B-C50C-407E-A947-70E740481C1C}">
-                <a14:useLocalDpi xmlns:a14="http://schemas.microsoft.com/office/drawing/2010/main" val="0"/>
-              </a:ext>
-            </a:extLst>
-          </a:blip>
-          <a:stretch>
-            <a:fillRect/>
-          </a:stretch>
-        </p:blipFill>
-        <p:spPr>
-          <a:xfrm>
-            <a:off x="1423828" y="2209800"/>
-            <a:ext cx="8960294" cy="2100263"/>
-          </a:xfrm>
-          <a:prstGeom prst="rect">
-            <a:avLst/>
-          </a:prstGeom>
-        </p:spPr>
-      </p:pic>
-    </p:spTree>
-    <p:extLst>
-      <p:ext uri="{BB962C8B-B14F-4D97-AF65-F5344CB8AC3E}">
-        <p14:creationId xmlns:p14="http://schemas.microsoft.com/office/powerpoint/2010/main" val="3863694603"/>
       </p:ext>
     </p:extLst>
   </p:cSld>
@@ -13492,6 +13084,416 @@
         <p:cNvPr id="1" name="">
           <a:extLst>
             <a:ext uri="{FF2B5EF4-FFF2-40B4-BE49-F238E27FC236}">
+              <a16:creationId xmlns:a16="http://schemas.microsoft.com/office/drawing/2014/main" id="{A2D0AD59-F6B5-72B1-2094-2F7D9597232B}"/>
+            </a:ext>
+          </a:extLst>
+        </p:cNvPr>
+        <p:cNvGrpSpPr/>
+        <p:nvPr/>
+      </p:nvGrpSpPr>
+      <p:grpSpPr>
+        <a:xfrm>
+          <a:off x="0" y="0"/>
+          <a:ext cx="0" cy="0"/>
+          <a:chOff x="0" y="0"/>
+          <a:chExt cx="0" cy="0"/>
+        </a:xfrm>
+      </p:grpSpPr>
+      <p:sp>
+        <p:nvSpPr>
+          <p:cNvPr id="2" name="Title 1">
+            <a:extLst>
+              <a:ext uri="{FF2B5EF4-FFF2-40B4-BE49-F238E27FC236}">
+                <a16:creationId xmlns:a16="http://schemas.microsoft.com/office/drawing/2014/main" id="{920AF7D0-F83C-97FB-414D-D2F08180C6C4}"/>
+              </a:ext>
+            </a:extLst>
+          </p:cNvPr>
+          <p:cNvSpPr>
+            <a:spLocks noGrp="1"/>
+          </p:cNvSpPr>
+          <p:nvPr>
+            <p:ph type="title"/>
+          </p:nvPr>
+        </p:nvSpPr>
+        <p:spPr>
+          <a:xfrm>
+            <a:off x="2133600" y="171857"/>
+            <a:ext cx="7924800" cy="457201"/>
+          </a:xfrm>
+        </p:spPr>
+        <p:txBody>
+          <a:bodyPr>
+            <a:noAutofit/>
+          </a:bodyPr>
+          <a:lstStyle/>
+          <a:p>
+            <a:pPr algn="ctr"/>
+            <a:br>
+              <a:rPr lang="en-US" sz="3200" b="1" dirty="0"/>
+            </a:br>
+            <a:br>
+              <a:rPr lang="en-US" sz="3200" b="1" dirty="0"/>
+            </a:br>
+            <a:br>
+              <a:rPr lang="en-US" sz="3200" b="1" dirty="0"/>
+            </a:br>
+            <a:br>
+              <a:rPr lang="en-US" sz="3200" b="1" dirty="0"/>
+            </a:br>
+            <a:br>
+              <a:rPr lang="en-US" sz="3200" b="1" dirty="0"/>
+            </a:br>
+            <a:br>
+              <a:rPr lang="en-US" sz="3200" b="1" dirty="0"/>
+            </a:br>
+            <a:br>
+              <a:rPr lang="en-US" sz="3200" b="1" dirty="0"/>
+            </a:br>
+            <a:br>
+              <a:rPr lang="en-US" sz="3200" b="1" dirty="0"/>
+            </a:br>
+            <a:br>
+              <a:rPr lang="en-US" sz="3200" b="1" dirty="0"/>
+            </a:br>
+            <a:br>
+              <a:rPr lang="en-US" sz="3200" b="1" dirty="0"/>
+            </a:br>
+            <a:r>
+              <a:rPr lang="en-US" sz="3200" b="1" dirty="0"/>
+              <a:t>                     </a:t>
+            </a:r>
+            <a:br>
+              <a:rPr lang="en-US" sz="3200" b="1" dirty="0"/>
+            </a:br>
+            <a:br>
+              <a:rPr lang="en-US" sz="3200" b="1" dirty="0"/>
+            </a:br>
+            <a:br>
+              <a:rPr lang="en-US" sz="3200" b="1" dirty="0"/>
+            </a:br>
+            <a:br>
+              <a:rPr lang="en-US" sz="3200" b="1" dirty="0"/>
+            </a:br>
+            <a:br>
+              <a:rPr lang="en-US" sz="3200" b="1" dirty="0"/>
+            </a:br>
+            <a:endParaRPr lang="en-US" sz="3200" b="1" dirty="0"/>
+          </a:p>
+        </p:txBody>
+      </p:sp>
+      <p:sp>
+        <p:nvSpPr>
+          <p:cNvPr id="8" name="Slide Number Placeholder 3">
+            <a:extLst>
+              <a:ext uri="{FF2B5EF4-FFF2-40B4-BE49-F238E27FC236}">
+                <a16:creationId xmlns:a16="http://schemas.microsoft.com/office/drawing/2014/main" id="{9D687846-FAAB-0836-9251-6BBF40CE2F61}"/>
+              </a:ext>
+            </a:extLst>
+          </p:cNvPr>
+          <p:cNvSpPr txBox="1">
+            <a:spLocks/>
+          </p:cNvSpPr>
+          <p:nvPr/>
+        </p:nvSpPr>
+        <p:spPr>
+          <a:xfrm>
+            <a:off x="8534400" y="6629400"/>
+            <a:ext cx="2133600" cy="228600"/>
+          </a:xfrm>
+          <a:prstGeom prst="rect">
+            <a:avLst/>
+          </a:prstGeom>
+        </p:spPr>
+        <p:txBody>
+          <a:bodyPr vert="horz" lIns="91440" tIns="45720" rIns="91440" bIns="45720" rtlCol="0" anchor="ctr"/>
+          <a:lstStyle/>
+          <a:p>
+            <a:pPr algn="r">
+              <a:defRPr/>
+            </a:pPr>
+            <a:fld id="{B6F15528-21DE-4FAA-801E-634DDDAF4B2B}" type="slidenum">
+              <a:rPr lang="en-US" sz="1200">
+                <a:latin typeface="Rockwell" pitchFamily="18" charset="0"/>
+              </a:rPr>
+              <a:pPr algn="r">
+                <a:defRPr/>
+              </a:pPr>
+              <a:t>30</a:t>
+            </a:fld>
+            <a:endParaRPr lang="en-US" sz="1200" dirty="0">
+              <a:latin typeface="Rockwell" pitchFamily="18" charset="0"/>
+            </a:endParaRPr>
+          </a:p>
+        </p:txBody>
+      </p:sp>
+      <p:pic>
+        <p:nvPicPr>
+          <p:cNvPr id="10" name="Picture 4">
+            <a:extLst>
+              <a:ext uri="{FF2B5EF4-FFF2-40B4-BE49-F238E27FC236}">
+                <a16:creationId xmlns:a16="http://schemas.microsoft.com/office/drawing/2014/main" id="{C5D0B98D-3D49-9314-5AD6-ACA202F3DB8E}"/>
+              </a:ext>
+            </a:extLst>
+          </p:cNvPr>
+          <p:cNvPicPr>
+            <a:picLocks noChangeAspect="1" noChangeArrowheads="1"/>
+          </p:cNvPicPr>
+          <p:nvPr/>
+        </p:nvPicPr>
+        <p:blipFill>
+          <a:blip r:embed="rId2"/>
+          <a:srcRect/>
+          <a:stretch>
+            <a:fillRect/>
+          </a:stretch>
+        </p:blipFill>
+        <p:spPr bwMode="auto">
+          <a:xfrm>
+            <a:off x="533400" y="91480"/>
+            <a:ext cx="609600" cy="539014"/>
+          </a:xfrm>
+          <a:prstGeom prst="rect">
+            <a:avLst/>
+          </a:prstGeom>
+          <a:noFill/>
+          <a:ln w="9525">
+            <a:noFill/>
+            <a:miter lim="800000"/>
+            <a:headEnd/>
+            <a:tailEnd/>
+          </a:ln>
+          <a:effectLst/>
+        </p:spPr>
+      </p:pic>
+      <p:sp>
+        <p:nvSpPr>
+          <p:cNvPr id="12" name="Title 1">
+            <a:extLst>
+              <a:ext uri="{FF2B5EF4-FFF2-40B4-BE49-F238E27FC236}">
+                <a16:creationId xmlns:a16="http://schemas.microsoft.com/office/drawing/2014/main" id="{53C5790F-64DB-29DF-3E53-0D2B3644B43F}"/>
+              </a:ext>
+            </a:extLst>
+          </p:cNvPr>
+          <p:cNvSpPr txBox="1">
+            <a:spLocks/>
+          </p:cNvSpPr>
+          <p:nvPr/>
+        </p:nvSpPr>
+        <p:spPr>
+          <a:xfrm>
+            <a:off x="1880616" y="171856"/>
+            <a:ext cx="8046720" cy="457200"/>
+          </a:xfrm>
+          <a:prstGeom prst="rect">
+            <a:avLst/>
+          </a:prstGeom>
+        </p:spPr>
+        <p:txBody>
+          <a:bodyPr vert="horz" lIns="91440" tIns="45720" rIns="91440" bIns="45720" rtlCol="0" anchor="ctr">
+            <a:noAutofit/>
+          </a:bodyPr>
+          <a:lstStyle/>
+          <a:p>
+            <a:pPr algn="ctr">
+              <a:spcBef>
+                <a:spcPct val="0"/>
+              </a:spcBef>
+              <a:defRPr/>
+            </a:pPr>
+            <a:r>
+              <a:rPr lang="en-US" sz="3200" b="1" dirty="0">
+                <a:solidFill>
+                  <a:schemeClr val="tx1">
+                    <a:lumMod val="95000"/>
+                    <a:lumOff val="5000"/>
+                  </a:schemeClr>
+                </a:solidFill>
+                <a:latin typeface="+mj-lt"/>
+                <a:ea typeface="+mj-ea"/>
+                <a:cs typeface="+mj-cs"/>
+              </a:rPr>
+              <a:t>Data Flow Diagram</a:t>
+            </a:r>
+          </a:p>
+        </p:txBody>
+      </p:sp>
+      <p:pic>
+        <p:nvPicPr>
+          <p:cNvPr id="11" name="Picture 2">
+            <a:extLst>
+              <a:ext uri="{FF2B5EF4-FFF2-40B4-BE49-F238E27FC236}">
+                <a16:creationId xmlns:a16="http://schemas.microsoft.com/office/drawing/2014/main" id="{ACAE96B2-107F-FC13-6680-F7C5F0DE1587}"/>
+              </a:ext>
+            </a:extLst>
+          </p:cNvPr>
+          <p:cNvPicPr>
+            <a:picLocks noChangeAspect="1" noChangeArrowheads="1"/>
+          </p:cNvPicPr>
+          <p:nvPr/>
+        </p:nvPicPr>
+        <p:blipFill>
+          <a:blip r:embed="rId3" cstate="print"/>
+          <a:srcRect/>
+          <a:stretch>
+            <a:fillRect/>
+          </a:stretch>
+        </p:blipFill>
+        <p:spPr bwMode="auto">
+          <a:xfrm>
+            <a:off x="11100459" y="122550"/>
+            <a:ext cx="483679" cy="506506"/>
+          </a:xfrm>
+          <a:prstGeom prst="rect">
+            <a:avLst/>
+          </a:prstGeom>
+          <a:noFill/>
+          <a:ln w="9525">
+            <a:noFill/>
+            <a:miter lim="800000"/>
+            <a:headEnd/>
+            <a:tailEnd/>
+          </a:ln>
+          <a:effectLst/>
+        </p:spPr>
+      </p:pic>
+      <p:sp>
+        <p:nvSpPr>
+          <p:cNvPr id="16" name="Slide Number Placeholder 3">
+            <a:extLst>
+              <a:ext uri="{FF2B5EF4-FFF2-40B4-BE49-F238E27FC236}">
+                <a16:creationId xmlns:a16="http://schemas.microsoft.com/office/drawing/2014/main" id="{45107E22-3429-A654-6EE1-A4C2E4F457AC}"/>
+              </a:ext>
+            </a:extLst>
+          </p:cNvPr>
+          <p:cNvSpPr txBox="1">
+            <a:spLocks/>
+          </p:cNvSpPr>
+          <p:nvPr/>
+        </p:nvSpPr>
+        <p:spPr>
+          <a:xfrm>
+            <a:off x="2055875" y="6608708"/>
+            <a:ext cx="7696200" cy="228600"/>
+          </a:xfrm>
+          <a:prstGeom prst="rect">
+            <a:avLst/>
+          </a:prstGeom>
+        </p:spPr>
+        <p:txBody>
+          <a:bodyPr vert="horz" lIns="91440" tIns="45720" rIns="91440" bIns="45720" rtlCol="0" anchor="ctr"/>
+          <a:lstStyle/>
+          <a:p>
+            <a:pPr algn="ctr"/>
+            <a:r>
+              <a:rPr lang="en-US" sz="1200" b="1" dirty="0">
+                <a:latin typeface="Times New Roman" panose="02020603050405020304" pitchFamily="18" charset="0"/>
+                <a:cs typeface="Times New Roman" pitchFamily="18" charset="0"/>
+              </a:rPr>
+              <a:t>Smart Waste Management System (SWMS)</a:t>
+            </a:r>
+            <a:endParaRPr lang="en-US" sz="1200" dirty="0">
+              <a:latin typeface="Times New Roman" panose="02020603050405020304" pitchFamily="18" charset="0"/>
+              <a:cs typeface="Times New Roman" panose="02020603050405020304" pitchFamily="18" charset="0"/>
+            </a:endParaRPr>
+          </a:p>
+        </p:txBody>
+      </p:sp>
+      <p:sp>
+        <p:nvSpPr>
+          <p:cNvPr id="6" name="TextBox 5">
+            <a:extLst>
+              <a:ext uri="{FF2B5EF4-FFF2-40B4-BE49-F238E27FC236}">
+                <a16:creationId xmlns:a16="http://schemas.microsoft.com/office/drawing/2014/main" id="{EFAFAD74-8FB7-C544-01FA-C13BF7BC3BD6}"/>
+              </a:ext>
+            </a:extLst>
+          </p:cNvPr>
+          <p:cNvSpPr txBox="1"/>
+          <p:nvPr/>
+        </p:nvSpPr>
+        <p:spPr>
+          <a:xfrm>
+            <a:off x="5414563" y="4724400"/>
+            <a:ext cx="1362874" cy="276999"/>
+          </a:xfrm>
+          <a:prstGeom prst="rect">
+            <a:avLst/>
+          </a:prstGeom>
+          <a:noFill/>
+        </p:spPr>
+        <p:txBody>
+          <a:bodyPr wrap="none" rtlCol="0">
+            <a:spAutoFit/>
+          </a:bodyPr>
+          <a:lstStyle/>
+          <a:p>
+            <a:pPr algn="ctr"/>
+            <a:r>
+              <a:rPr lang="en-US" sz="1200" dirty="0">
+                <a:latin typeface="Times New Roman" panose="02020603050405020304" pitchFamily="18" charset="0"/>
+                <a:cs typeface="Times New Roman" panose="02020603050405020304" pitchFamily="18" charset="0"/>
+              </a:rPr>
+              <a:t>Figure 6.1 Level 0.</a:t>
+            </a:r>
+          </a:p>
+        </p:txBody>
+      </p:sp>
+      <p:pic>
+        <p:nvPicPr>
+          <p:cNvPr id="5" name="Picture 4">
+            <a:extLst>
+              <a:ext uri="{FF2B5EF4-FFF2-40B4-BE49-F238E27FC236}">
+                <a16:creationId xmlns:a16="http://schemas.microsoft.com/office/drawing/2014/main" id="{2362BA51-D0E5-4C58-2F2A-05D3E6F0A8A4}"/>
+              </a:ext>
+            </a:extLst>
+          </p:cNvPr>
+          <p:cNvPicPr>
+            <a:picLocks noChangeAspect="1"/>
+          </p:cNvPicPr>
+          <p:nvPr/>
+        </p:nvPicPr>
+        <p:blipFill>
+          <a:blip r:embed="rId4">
+            <a:extLst>
+              <a:ext uri="{28A0092B-C50C-407E-A947-70E740481C1C}">
+                <a14:useLocalDpi xmlns:a14="http://schemas.microsoft.com/office/drawing/2010/main" val="0"/>
+              </a:ext>
+            </a:extLst>
+          </a:blip>
+          <a:stretch>
+            <a:fillRect/>
+          </a:stretch>
+        </p:blipFill>
+        <p:spPr>
+          <a:xfrm>
+            <a:off x="1423828" y="2209800"/>
+            <a:ext cx="8960294" cy="2100263"/>
+          </a:xfrm>
+          <a:prstGeom prst="rect">
+            <a:avLst/>
+          </a:prstGeom>
+        </p:spPr>
+      </p:pic>
+    </p:spTree>
+    <p:extLst>
+      <p:ext uri="{BB962C8B-B14F-4D97-AF65-F5344CB8AC3E}">
+        <p14:creationId xmlns:p14="http://schemas.microsoft.com/office/powerpoint/2010/main" val="3863694603"/>
+      </p:ext>
+    </p:extLst>
+  </p:cSld>
+  <p:clrMapOvr>
+    <a:masterClrMapping/>
+  </p:clrMapOvr>
+</p:sld>
+</file>
+
+<file path=ppt/slides/slide31.xml><?xml version="1.0" encoding="utf-8"?>
+<p:sld xmlns:a="http://schemas.openxmlformats.org/drawingml/2006/main" xmlns:r="http://schemas.openxmlformats.org/officeDocument/2006/relationships" xmlns:p="http://schemas.openxmlformats.org/presentationml/2006/main">
+  <p:cSld>
+    <p:spTree>
+      <p:nvGrpSpPr>
+        <p:cNvPr id="1" name="">
+          <a:extLst>
+            <a:ext uri="{FF2B5EF4-FFF2-40B4-BE49-F238E27FC236}">
               <a16:creationId xmlns:a16="http://schemas.microsoft.com/office/drawing/2014/main" id="{1862F058-7939-1505-F489-FB033D115A98}"/>
             </a:ext>
           </a:extLst>
@@ -13626,7 +13628,7 @@
               <a:pPr algn="r">
                 <a:defRPr/>
               </a:pPr>
-              <a:t>30</a:t>
+              <a:t>31</a:t>
             </a:fld>
             <a:endParaRPr lang="en-US" sz="1200" dirty="0">
               <a:latin typeface="Rockwell" pitchFamily="18" charset="0"/>
@@ -13894,7 +13896,7 @@
 </p:sld>
 </file>
 
-<file path=ppt/slides/slide31.xml><?xml version="1.0" encoding="utf-8"?>
+<file path=ppt/slides/slide32.xml><?xml version="1.0" encoding="utf-8"?>
 <p:sld xmlns:a="http://schemas.openxmlformats.org/drawingml/2006/main" xmlns:r="http://schemas.openxmlformats.org/officeDocument/2006/relationships" xmlns:p="http://schemas.openxmlformats.org/presentationml/2006/main">
   <p:cSld>
     <p:spTree>
@@ -14036,7 +14038,7 @@
               <a:pPr algn="r">
                 <a:defRPr/>
               </a:pPr>
-              <a:t>31</a:t>
+              <a:t>32</a:t>
             </a:fld>
             <a:endParaRPr lang="en-US" sz="1200" dirty="0">
               <a:latin typeface="Rockwell" pitchFamily="18" charset="0"/>
@@ -14304,7 +14306,7 @@
 </p:sld>
 </file>
 
-<file path=ppt/slides/slide32.xml><?xml version="1.0" encoding="utf-8"?>
+<file path=ppt/slides/slide33.xml><?xml version="1.0" encoding="utf-8"?>
 <p:sld xmlns:a="http://schemas.openxmlformats.org/drawingml/2006/main" xmlns:r="http://schemas.openxmlformats.org/officeDocument/2006/relationships" xmlns:p="http://schemas.openxmlformats.org/presentationml/2006/main">
   <p:cSld>
     <p:spTree>
@@ -14446,7 +14448,7 @@
               <a:pPr algn="r">
                 <a:defRPr/>
               </a:pPr>
-              <a:t>32</a:t>
+              <a:t>33</a:t>
             </a:fld>
             <a:endParaRPr lang="en-US" sz="1200" dirty="0">
               <a:latin typeface="Rockwell" pitchFamily="18" charset="0"/>
@@ -14714,7 +14716,7 @@
 </p:sld>
 </file>
 
-<file path=ppt/slides/slide33.xml><?xml version="1.0" encoding="utf-8"?>
+<file path=ppt/slides/slide34.xml><?xml version="1.0" encoding="utf-8"?>
 <p:sld xmlns:a="http://schemas.openxmlformats.org/drawingml/2006/main" xmlns:r="http://schemas.openxmlformats.org/officeDocument/2006/relationships" xmlns:p="http://schemas.openxmlformats.org/presentationml/2006/main">
   <p:cSld>
     <p:spTree>
@@ -14856,7 +14858,7 @@
               <a:pPr algn="r">
                 <a:defRPr/>
               </a:pPr>
-              <a:t>33</a:t>
+              <a:t>34</a:t>
             </a:fld>
             <a:endParaRPr lang="en-US" sz="1200" dirty="0">
               <a:latin typeface="Rockwell" pitchFamily="18" charset="0"/>
@@ -15124,7 +15126,7 @@
 </p:sld>
 </file>
 
-<file path=ppt/slides/slide34.xml><?xml version="1.0" encoding="utf-8"?>
+<file path=ppt/slides/slide35.xml><?xml version="1.0" encoding="utf-8"?>
 <p:sld xmlns:a="http://schemas.openxmlformats.org/drawingml/2006/main" xmlns:r="http://schemas.openxmlformats.org/officeDocument/2006/relationships" xmlns:p="http://schemas.openxmlformats.org/presentationml/2006/main">
   <p:cSld>
     <p:spTree>
@@ -15266,7 +15268,7 @@
               <a:pPr algn="r">
                 <a:defRPr/>
               </a:pPr>
-              <a:t>34</a:t>
+              <a:t>35</a:t>
             </a:fld>
             <a:endParaRPr lang="en-US" sz="1200" dirty="0">
               <a:latin typeface="Rockwell" pitchFamily="18" charset="0"/>
@@ -15459,7 +15461,7 @@
 </p:sld>
 </file>
 
-<file path=ppt/slides/slide35.xml><?xml version="1.0" encoding="utf-8"?>
+<file path=ppt/slides/slide36.xml><?xml version="1.0" encoding="utf-8"?>
 <p:sld xmlns:a="http://schemas.openxmlformats.org/drawingml/2006/main" xmlns:r="http://schemas.openxmlformats.org/officeDocument/2006/relationships" xmlns:p="http://schemas.openxmlformats.org/presentationml/2006/main">
   <p:cSld>
     <p:spTree>
@@ -15601,7 +15603,7 @@
               <a:pPr algn="r">
                 <a:defRPr/>
               </a:pPr>
-              <a:t>35</a:t>
+              <a:t>36</a:t>
             </a:fld>
             <a:endParaRPr lang="en-US" sz="1200" dirty="0">
               <a:latin typeface="Rockwell" pitchFamily="18" charset="0"/>
@@ -15824,7 +15826,7 @@
 </p:sld>
 </file>
 
-<file path=ppt/slides/slide36.xml><?xml version="1.0" encoding="utf-8"?>
+<file path=ppt/slides/slide37.xml><?xml version="1.0" encoding="utf-8"?>
 <p:sld xmlns:a="http://schemas.openxmlformats.org/drawingml/2006/main" xmlns:r="http://schemas.openxmlformats.org/officeDocument/2006/relationships" xmlns:p="http://schemas.openxmlformats.org/presentationml/2006/main">
   <p:cSld>
     <p:spTree>
@@ -15966,7 +15968,7 @@
               <a:pPr algn="r">
                 <a:defRPr/>
               </a:pPr>
-              <a:t>36</a:t>
+              <a:t>37</a:t>
             </a:fld>
             <a:endParaRPr lang="en-US" sz="1200" dirty="0">
               <a:latin typeface="Rockwell" pitchFamily="18" charset="0"/>
@@ -16189,7 +16191,7 @@
 </p:sld>
 </file>
 
-<file path=ppt/slides/slide37.xml><?xml version="1.0" encoding="utf-8"?>
+<file path=ppt/slides/slide38.xml><?xml version="1.0" encoding="utf-8"?>
 <p:sld xmlns:a="http://schemas.openxmlformats.org/drawingml/2006/main" xmlns:r="http://schemas.openxmlformats.org/officeDocument/2006/relationships" xmlns:p="http://schemas.openxmlformats.org/presentationml/2006/main">
   <p:cSld>
     <p:spTree>
@@ -16331,7 +16333,7 @@
               <a:pPr algn="r">
                 <a:defRPr/>
               </a:pPr>
-              <a:t>37</a:t>
+              <a:t>38</a:t>
             </a:fld>
             <a:endParaRPr lang="en-US" sz="1200" dirty="0">
               <a:latin typeface="Rockwell" pitchFamily="18" charset="0"/>
@@ -17668,7 +17670,7 @@
 </p:sld>
 </file>
 
-<file path=ppt/slides/slide38.xml><?xml version="1.0" encoding="utf-8"?>
+<file path=ppt/slides/slide39.xml><?xml version="1.0" encoding="utf-8"?>
 <p:sld xmlns:a="http://schemas.openxmlformats.org/drawingml/2006/main" xmlns:r="http://schemas.openxmlformats.org/officeDocument/2006/relationships" xmlns:p="http://schemas.openxmlformats.org/presentationml/2006/main">
   <p:cSld>
     <p:spTree>
@@ -17810,7 +17812,7 @@
               <a:pPr algn="r">
                 <a:defRPr/>
               </a:pPr>
-              <a:t>38</a:t>
+              <a:t>39</a:t>
             </a:fld>
             <a:endParaRPr lang="en-US" sz="1200" dirty="0">
               <a:latin typeface="Rockwell" pitchFamily="18" charset="0"/>
@@ -17994,371 +17996,6 @@
     <p:extLst>
       <p:ext uri="{BB962C8B-B14F-4D97-AF65-F5344CB8AC3E}">
         <p14:creationId xmlns:p14="http://schemas.microsoft.com/office/powerpoint/2010/main" val="2930590718"/>
-      </p:ext>
-    </p:extLst>
-  </p:cSld>
-  <p:clrMapOvr>
-    <a:masterClrMapping/>
-  </p:clrMapOvr>
-</p:sld>
-</file>
-
-<file path=ppt/slides/slide39.xml><?xml version="1.0" encoding="utf-8"?>
-<p:sld xmlns:a="http://schemas.openxmlformats.org/drawingml/2006/main" xmlns:r="http://schemas.openxmlformats.org/officeDocument/2006/relationships" xmlns:p="http://schemas.openxmlformats.org/presentationml/2006/main">
-  <p:cSld>
-    <p:spTree>
-      <p:nvGrpSpPr>
-        <p:cNvPr id="1" name="">
-          <a:extLst>
-            <a:ext uri="{FF2B5EF4-FFF2-40B4-BE49-F238E27FC236}">
-              <a16:creationId xmlns:a16="http://schemas.microsoft.com/office/drawing/2014/main" id="{BB4A48C1-E25A-4053-272A-E4677BD30096}"/>
-            </a:ext>
-          </a:extLst>
-        </p:cNvPr>
-        <p:cNvGrpSpPr/>
-        <p:nvPr/>
-      </p:nvGrpSpPr>
-      <p:grpSpPr>
-        <a:xfrm>
-          <a:off x="0" y="0"/>
-          <a:ext cx="0" cy="0"/>
-          <a:chOff x="0" y="0"/>
-          <a:chExt cx="0" cy="0"/>
-        </a:xfrm>
-      </p:grpSpPr>
-      <p:sp>
-        <p:nvSpPr>
-          <p:cNvPr id="2" name="Title 1">
-            <a:extLst>
-              <a:ext uri="{FF2B5EF4-FFF2-40B4-BE49-F238E27FC236}">
-                <a16:creationId xmlns:a16="http://schemas.microsoft.com/office/drawing/2014/main" id="{7DE3FEAF-16FD-6526-58DF-CA2A5AD96066}"/>
-              </a:ext>
-            </a:extLst>
-          </p:cNvPr>
-          <p:cNvSpPr>
-            <a:spLocks noGrp="1"/>
-          </p:cNvSpPr>
-          <p:nvPr>
-            <p:ph type="title"/>
-          </p:nvPr>
-        </p:nvSpPr>
-        <p:spPr>
-          <a:xfrm>
-            <a:off x="2133600" y="171857"/>
-            <a:ext cx="7924800" cy="457201"/>
-          </a:xfrm>
-        </p:spPr>
-        <p:txBody>
-          <a:bodyPr>
-            <a:noAutofit/>
-          </a:bodyPr>
-          <a:lstStyle/>
-          <a:p>
-            <a:pPr algn="ctr"/>
-            <a:br>
-              <a:rPr lang="en-US" sz="3200" b="1" dirty="0"/>
-            </a:br>
-            <a:br>
-              <a:rPr lang="en-US" sz="3200" b="1" dirty="0"/>
-            </a:br>
-            <a:br>
-              <a:rPr lang="en-US" sz="3200" b="1" dirty="0"/>
-            </a:br>
-            <a:br>
-              <a:rPr lang="en-US" sz="3200" b="1" dirty="0"/>
-            </a:br>
-            <a:br>
-              <a:rPr lang="en-US" sz="3200" b="1" dirty="0"/>
-            </a:br>
-            <a:br>
-              <a:rPr lang="en-US" sz="3200" b="1" dirty="0"/>
-            </a:br>
-            <a:br>
-              <a:rPr lang="en-US" sz="3200" b="1" dirty="0"/>
-            </a:br>
-            <a:br>
-              <a:rPr lang="en-US" sz="3200" b="1" dirty="0"/>
-            </a:br>
-            <a:br>
-              <a:rPr lang="en-US" sz="3200" b="1" dirty="0"/>
-            </a:br>
-            <a:br>
-              <a:rPr lang="en-US" sz="3200" b="1" dirty="0"/>
-            </a:br>
-            <a:r>
-              <a:rPr lang="en-US" sz="3200" b="1" dirty="0"/>
-              <a:t>                     </a:t>
-            </a:r>
-            <a:br>
-              <a:rPr lang="en-US" sz="3200" b="1" dirty="0"/>
-            </a:br>
-            <a:br>
-              <a:rPr lang="en-US" sz="3200" b="1" dirty="0"/>
-            </a:br>
-            <a:br>
-              <a:rPr lang="en-US" sz="3200" b="1" dirty="0"/>
-            </a:br>
-            <a:br>
-              <a:rPr lang="en-US" sz="3200" b="1" dirty="0"/>
-            </a:br>
-            <a:br>
-              <a:rPr lang="en-US" sz="3200" b="1" dirty="0"/>
-            </a:br>
-            <a:endParaRPr lang="en-US" sz="3200" b="1" dirty="0"/>
-          </a:p>
-        </p:txBody>
-      </p:sp>
-      <p:sp>
-        <p:nvSpPr>
-          <p:cNvPr id="8" name="Slide Number Placeholder 3">
-            <a:extLst>
-              <a:ext uri="{FF2B5EF4-FFF2-40B4-BE49-F238E27FC236}">
-                <a16:creationId xmlns:a16="http://schemas.microsoft.com/office/drawing/2014/main" id="{551F989D-0288-B161-9BC9-B52DF7C57BF7}"/>
-              </a:ext>
-            </a:extLst>
-          </p:cNvPr>
-          <p:cNvSpPr txBox="1">
-            <a:spLocks/>
-          </p:cNvSpPr>
-          <p:nvPr/>
-        </p:nvSpPr>
-        <p:spPr>
-          <a:xfrm>
-            <a:off x="8534400" y="6629400"/>
-            <a:ext cx="2133600" cy="228600"/>
-          </a:xfrm>
-          <a:prstGeom prst="rect">
-            <a:avLst/>
-          </a:prstGeom>
-        </p:spPr>
-        <p:txBody>
-          <a:bodyPr vert="horz" lIns="91440" tIns="45720" rIns="91440" bIns="45720" rtlCol="0" anchor="ctr"/>
-          <a:lstStyle/>
-          <a:p>
-            <a:pPr algn="r">
-              <a:defRPr/>
-            </a:pPr>
-            <a:fld id="{B6F15528-21DE-4FAA-801E-634DDDAF4B2B}" type="slidenum">
-              <a:rPr lang="en-US" sz="1200">
-                <a:latin typeface="Rockwell" pitchFamily="18" charset="0"/>
-              </a:rPr>
-              <a:pPr algn="r">
-                <a:defRPr/>
-              </a:pPr>
-              <a:t>39</a:t>
-            </a:fld>
-            <a:endParaRPr lang="en-US" sz="1200" dirty="0">
-              <a:latin typeface="Rockwell" pitchFamily="18" charset="0"/>
-            </a:endParaRPr>
-          </a:p>
-        </p:txBody>
-      </p:sp>
-      <p:pic>
-        <p:nvPicPr>
-          <p:cNvPr id="10" name="Picture 4">
-            <a:extLst>
-              <a:ext uri="{FF2B5EF4-FFF2-40B4-BE49-F238E27FC236}">
-                <a16:creationId xmlns:a16="http://schemas.microsoft.com/office/drawing/2014/main" id="{1B46AA02-A9BF-C621-F393-F7CD5F1EFD6C}"/>
-              </a:ext>
-            </a:extLst>
-          </p:cNvPr>
-          <p:cNvPicPr>
-            <a:picLocks noChangeAspect="1" noChangeArrowheads="1"/>
-          </p:cNvPicPr>
-          <p:nvPr/>
-        </p:nvPicPr>
-        <p:blipFill>
-          <a:blip r:embed="rId2"/>
-          <a:srcRect/>
-          <a:stretch>
-            <a:fillRect/>
-          </a:stretch>
-        </p:blipFill>
-        <p:spPr bwMode="auto">
-          <a:xfrm>
-            <a:off x="533400" y="91480"/>
-            <a:ext cx="609600" cy="539014"/>
-          </a:xfrm>
-          <a:prstGeom prst="rect">
-            <a:avLst/>
-          </a:prstGeom>
-          <a:noFill/>
-          <a:ln w="9525">
-            <a:noFill/>
-            <a:miter lim="800000"/>
-            <a:headEnd/>
-            <a:tailEnd/>
-          </a:ln>
-          <a:effectLst/>
-        </p:spPr>
-      </p:pic>
-      <p:sp>
-        <p:nvSpPr>
-          <p:cNvPr id="12" name="Title 1">
-            <a:extLst>
-              <a:ext uri="{FF2B5EF4-FFF2-40B4-BE49-F238E27FC236}">
-                <a16:creationId xmlns:a16="http://schemas.microsoft.com/office/drawing/2014/main" id="{670D0942-9898-C44E-F980-E2A3E7AC9A9A}"/>
-              </a:ext>
-            </a:extLst>
-          </p:cNvPr>
-          <p:cNvSpPr txBox="1">
-            <a:spLocks/>
-          </p:cNvSpPr>
-          <p:nvPr/>
-        </p:nvSpPr>
-        <p:spPr>
-          <a:xfrm>
-            <a:off x="1880616" y="171856"/>
-            <a:ext cx="8046720" cy="457200"/>
-          </a:xfrm>
-          <a:prstGeom prst="rect">
-            <a:avLst/>
-          </a:prstGeom>
-        </p:spPr>
-        <p:txBody>
-          <a:bodyPr vert="horz" lIns="91440" tIns="45720" rIns="91440" bIns="45720" rtlCol="0" anchor="ctr">
-            <a:noAutofit/>
-          </a:bodyPr>
-          <a:lstStyle/>
-          <a:p>
-            <a:pPr algn="ctr">
-              <a:spcBef>
-                <a:spcPct val="0"/>
-              </a:spcBef>
-              <a:defRPr/>
-            </a:pPr>
-            <a:r>
-              <a:rPr lang="en-US" sz="3200" b="1" dirty="0">
-                <a:solidFill>
-                  <a:schemeClr val="tx1">
-                    <a:lumMod val="95000"/>
-                    <a:lumOff val="5000"/>
-                  </a:schemeClr>
-                </a:solidFill>
-                <a:latin typeface="+mj-lt"/>
-                <a:ea typeface="+mj-ea"/>
-                <a:cs typeface="+mj-cs"/>
-              </a:rPr>
-              <a:t>Login Screen</a:t>
-            </a:r>
-          </a:p>
-        </p:txBody>
-      </p:sp>
-      <p:pic>
-        <p:nvPicPr>
-          <p:cNvPr id="11" name="Picture 2">
-            <a:extLst>
-              <a:ext uri="{FF2B5EF4-FFF2-40B4-BE49-F238E27FC236}">
-                <a16:creationId xmlns:a16="http://schemas.microsoft.com/office/drawing/2014/main" id="{82728A80-2AC9-31C4-9021-2F0D76D422A9}"/>
-              </a:ext>
-            </a:extLst>
-          </p:cNvPr>
-          <p:cNvPicPr>
-            <a:picLocks noChangeAspect="1" noChangeArrowheads="1"/>
-          </p:cNvPicPr>
-          <p:nvPr/>
-        </p:nvPicPr>
-        <p:blipFill>
-          <a:blip r:embed="rId3" cstate="print"/>
-          <a:srcRect/>
-          <a:stretch>
-            <a:fillRect/>
-          </a:stretch>
-        </p:blipFill>
-        <p:spPr bwMode="auto">
-          <a:xfrm>
-            <a:off x="11100459" y="122550"/>
-            <a:ext cx="483679" cy="506506"/>
-          </a:xfrm>
-          <a:prstGeom prst="rect">
-            <a:avLst/>
-          </a:prstGeom>
-          <a:noFill/>
-          <a:ln w="9525">
-            <a:noFill/>
-            <a:miter lim="800000"/>
-            <a:headEnd/>
-            <a:tailEnd/>
-          </a:ln>
-          <a:effectLst/>
-        </p:spPr>
-      </p:pic>
-      <p:sp>
-        <p:nvSpPr>
-          <p:cNvPr id="16" name="Slide Number Placeholder 3">
-            <a:extLst>
-              <a:ext uri="{FF2B5EF4-FFF2-40B4-BE49-F238E27FC236}">
-                <a16:creationId xmlns:a16="http://schemas.microsoft.com/office/drawing/2014/main" id="{68ADFE92-6A4E-DF06-5F32-C417A92A9438}"/>
-              </a:ext>
-            </a:extLst>
-          </p:cNvPr>
-          <p:cNvSpPr txBox="1">
-            <a:spLocks/>
-          </p:cNvSpPr>
-          <p:nvPr/>
-        </p:nvSpPr>
-        <p:spPr>
-          <a:xfrm>
-            <a:off x="2055875" y="6608708"/>
-            <a:ext cx="7696200" cy="228600"/>
-          </a:xfrm>
-          <a:prstGeom prst="rect">
-            <a:avLst/>
-          </a:prstGeom>
-        </p:spPr>
-        <p:txBody>
-          <a:bodyPr vert="horz" lIns="91440" tIns="45720" rIns="91440" bIns="45720" rtlCol="0" anchor="ctr"/>
-          <a:lstStyle/>
-          <a:p>
-            <a:pPr algn="ctr"/>
-            <a:r>
-              <a:rPr lang="en-US" sz="1200" b="1" dirty="0">
-                <a:latin typeface="Times New Roman" panose="02020603050405020304" pitchFamily="18" charset="0"/>
-                <a:cs typeface="Times New Roman" pitchFamily="18" charset="0"/>
-              </a:rPr>
-              <a:t>Smart Waste Management System (SWMS)</a:t>
-            </a:r>
-            <a:endParaRPr lang="en-US" sz="1200" dirty="0">
-              <a:latin typeface="Times New Roman" panose="02020603050405020304" pitchFamily="18" charset="0"/>
-              <a:cs typeface="Times New Roman" panose="02020603050405020304" pitchFamily="18" charset="0"/>
-            </a:endParaRPr>
-          </a:p>
-        </p:txBody>
-      </p:sp>
-      <p:pic>
-        <p:nvPicPr>
-          <p:cNvPr id="5" name="Picture 4">
-            <a:extLst>
-              <a:ext uri="{FF2B5EF4-FFF2-40B4-BE49-F238E27FC236}">
-                <a16:creationId xmlns:a16="http://schemas.microsoft.com/office/drawing/2014/main" id="{C6565DB6-CF79-A3BA-EFBF-979B1B3BFC01}"/>
-              </a:ext>
-            </a:extLst>
-          </p:cNvPr>
-          <p:cNvPicPr>
-            <a:picLocks noChangeAspect="1"/>
-          </p:cNvPicPr>
-          <p:nvPr/>
-        </p:nvPicPr>
-        <p:blipFill>
-          <a:blip r:embed="rId4"/>
-          <a:stretch>
-            <a:fillRect/>
-          </a:stretch>
-        </p:blipFill>
-        <p:spPr>
-          <a:xfrm>
-            <a:off x="1293875" y="1363444"/>
-            <a:ext cx="9220200" cy="4435553"/>
-          </a:xfrm>
-          <a:prstGeom prst="rect">
-            <a:avLst/>
-          </a:prstGeom>
-        </p:spPr>
-      </p:pic>
-    </p:spTree>
-    <p:extLst>
-      <p:ext uri="{BB962C8B-B14F-4D97-AF65-F5344CB8AC3E}">
-        <p14:creationId xmlns:p14="http://schemas.microsoft.com/office/powerpoint/2010/main" val="1853311162"/>
       </p:ext>
     </p:extLst>
   </p:cSld>
@@ -18885,6 +18522,371 @@
         <p:cNvPr id="1" name="">
           <a:extLst>
             <a:ext uri="{FF2B5EF4-FFF2-40B4-BE49-F238E27FC236}">
+              <a16:creationId xmlns:a16="http://schemas.microsoft.com/office/drawing/2014/main" id="{BB4A48C1-E25A-4053-272A-E4677BD30096}"/>
+            </a:ext>
+          </a:extLst>
+        </p:cNvPr>
+        <p:cNvGrpSpPr/>
+        <p:nvPr/>
+      </p:nvGrpSpPr>
+      <p:grpSpPr>
+        <a:xfrm>
+          <a:off x="0" y="0"/>
+          <a:ext cx="0" cy="0"/>
+          <a:chOff x="0" y="0"/>
+          <a:chExt cx="0" cy="0"/>
+        </a:xfrm>
+      </p:grpSpPr>
+      <p:sp>
+        <p:nvSpPr>
+          <p:cNvPr id="2" name="Title 1">
+            <a:extLst>
+              <a:ext uri="{FF2B5EF4-FFF2-40B4-BE49-F238E27FC236}">
+                <a16:creationId xmlns:a16="http://schemas.microsoft.com/office/drawing/2014/main" id="{7DE3FEAF-16FD-6526-58DF-CA2A5AD96066}"/>
+              </a:ext>
+            </a:extLst>
+          </p:cNvPr>
+          <p:cNvSpPr>
+            <a:spLocks noGrp="1"/>
+          </p:cNvSpPr>
+          <p:nvPr>
+            <p:ph type="title"/>
+          </p:nvPr>
+        </p:nvSpPr>
+        <p:spPr>
+          <a:xfrm>
+            <a:off x="2133600" y="171857"/>
+            <a:ext cx="7924800" cy="457201"/>
+          </a:xfrm>
+        </p:spPr>
+        <p:txBody>
+          <a:bodyPr>
+            <a:noAutofit/>
+          </a:bodyPr>
+          <a:lstStyle/>
+          <a:p>
+            <a:pPr algn="ctr"/>
+            <a:br>
+              <a:rPr lang="en-US" sz="3200" b="1" dirty="0"/>
+            </a:br>
+            <a:br>
+              <a:rPr lang="en-US" sz="3200" b="1" dirty="0"/>
+            </a:br>
+            <a:br>
+              <a:rPr lang="en-US" sz="3200" b="1" dirty="0"/>
+            </a:br>
+            <a:br>
+              <a:rPr lang="en-US" sz="3200" b="1" dirty="0"/>
+            </a:br>
+            <a:br>
+              <a:rPr lang="en-US" sz="3200" b="1" dirty="0"/>
+            </a:br>
+            <a:br>
+              <a:rPr lang="en-US" sz="3200" b="1" dirty="0"/>
+            </a:br>
+            <a:br>
+              <a:rPr lang="en-US" sz="3200" b="1" dirty="0"/>
+            </a:br>
+            <a:br>
+              <a:rPr lang="en-US" sz="3200" b="1" dirty="0"/>
+            </a:br>
+            <a:br>
+              <a:rPr lang="en-US" sz="3200" b="1" dirty="0"/>
+            </a:br>
+            <a:br>
+              <a:rPr lang="en-US" sz="3200" b="1" dirty="0"/>
+            </a:br>
+            <a:r>
+              <a:rPr lang="en-US" sz="3200" b="1" dirty="0"/>
+              <a:t>                     </a:t>
+            </a:r>
+            <a:br>
+              <a:rPr lang="en-US" sz="3200" b="1" dirty="0"/>
+            </a:br>
+            <a:br>
+              <a:rPr lang="en-US" sz="3200" b="1" dirty="0"/>
+            </a:br>
+            <a:br>
+              <a:rPr lang="en-US" sz="3200" b="1" dirty="0"/>
+            </a:br>
+            <a:br>
+              <a:rPr lang="en-US" sz="3200" b="1" dirty="0"/>
+            </a:br>
+            <a:br>
+              <a:rPr lang="en-US" sz="3200" b="1" dirty="0"/>
+            </a:br>
+            <a:endParaRPr lang="en-US" sz="3200" b="1" dirty="0"/>
+          </a:p>
+        </p:txBody>
+      </p:sp>
+      <p:sp>
+        <p:nvSpPr>
+          <p:cNvPr id="8" name="Slide Number Placeholder 3">
+            <a:extLst>
+              <a:ext uri="{FF2B5EF4-FFF2-40B4-BE49-F238E27FC236}">
+                <a16:creationId xmlns:a16="http://schemas.microsoft.com/office/drawing/2014/main" id="{551F989D-0288-B161-9BC9-B52DF7C57BF7}"/>
+              </a:ext>
+            </a:extLst>
+          </p:cNvPr>
+          <p:cNvSpPr txBox="1">
+            <a:spLocks/>
+          </p:cNvSpPr>
+          <p:nvPr/>
+        </p:nvSpPr>
+        <p:spPr>
+          <a:xfrm>
+            <a:off x="8534400" y="6629400"/>
+            <a:ext cx="2133600" cy="228600"/>
+          </a:xfrm>
+          <a:prstGeom prst="rect">
+            <a:avLst/>
+          </a:prstGeom>
+        </p:spPr>
+        <p:txBody>
+          <a:bodyPr vert="horz" lIns="91440" tIns="45720" rIns="91440" bIns="45720" rtlCol="0" anchor="ctr"/>
+          <a:lstStyle/>
+          <a:p>
+            <a:pPr algn="r">
+              <a:defRPr/>
+            </a:pPr>
+            <a:fld id="{B6F15528-21DE-4FAA-801E-634DDDAF4B2B}" type="slidenum">
+              <a:rPr lang="en-US" sz="1200">
+                <a:latin typeface="Rockwell" pitchFamily="18" charset="0"/>
+              </a:rPr>
+              <a:pPr algn="r">
+                <a:defRPr/>
+              </a:pPr>
+              <a:t>40</a:t>
+            </a:fld>
+            <a:endParaRPr lang="en-US" sz="1200" dirty="0">
+              <a:latin typeface="Rockwell" pitchFamily="18" charset="0"/>
+            </a:endParaRPr>
+          </a:p>
+        </p:txBody>
+      </p:sp>
+      <p:pic>
+        <p:nvPicPr>
+          <p:cNvPr id="10" name="Picture 4">
+            <a:extLst>
+              <a:ext uri="{FF2B5EF4-FFF2-40B4-BE49-F238E27FC236}">
+                <a16:creationId xmlns:a16="http://schemas.microsoft.com/office/drawing/2014/main" id="{1B46AA02-A9BF-C621-F393-F7CD5F1EFD6C}"/>
+              </a:ext>
+            </a:extLst>
+          </p:cNvPr>
+          <p:cNvPicPr>
+            <a:picLocks noChangeAspect="1" noChangeArrowheads="1"/>
+          </p:cNvPicPr>
+          <p:nvPr/>
+        </p:nvPicPr>
+        <p:blipFill>
+          <a:blip r:embed="rId2"/>
+          <a:srcRect/>
+          <a:stretch>
+            <a:fillRect/>
+          </a:stretch>
+        </p:blipFill>
+        <p:spPr bwMode="auto">
+          <a:xfrm>
+            <a:off x="533400" y="91480"/>
+            <a:ext cx="609600" cy="539014"/>
+          </a:xfrm>
+          <a:prstGeom prst="rect">
+            <a:avLst/>
+          </a:prstGeom>
+          <a:noFill/>
+          <a:ln w="9525">
+            <a:noFill/>
+            <a:miter lim="800000"/>
+            <a:headEnd/>
+            <a:tailEnd/>
+          </a:ln>
+          <a:effectLst/>
+        </p:spPr>
+      </p:pic>
+      <p:sp>
+        <p:nvSpPr>
+          <p:cNvPr id="12" name="Title 1">
+            <a:extLst>
+              <a:ext uri="{FF2B5EF4-FFF2-40B4-BE49-F238E27FC236}">
+                <a16:creationId xmlns:a16="http://schemas.microsoft.com/office/drawing/2014/main" id="{670D0942-9898-C44E-F980-E2A3E7AC9A9A}"/>
+              </a:ext>
+            </a:extLst>
+          </p:cNvPr>
+          <p:cNvSpPr txBox="1">
+            <a:spLocks/>
+          </p:cNvSpPr>
+          <p:nvPr/>
+        </p:nvSpPr>
+        <p:spPr>
+          <a:xfrm>
+            <a:off x="1880616" y="171856"/>
+            <a:ext cx="8046720" cy="457200"/>
+          </a:xfrm>
+          <a:prstGeom prst="rect">
+            <a:avLst/>
+          </a:prstGeom>
+        </p:spPr>
+        <p:txBody>
+          <a:bodyPr vert="horz" lIns="91440" tIns="45720" rIns="91440" bIns="45720" rtlCol="0" anchor="ctr">
+            <a:noAutofit/>
+          </a:bodyPr>
+          <a:lstStyle/>
+          <a:p>
+            <a:pPr algn="ctr">
+              <a:spcBef>
+                <a:spcPct val="0"/>
+              </a:spcBef>
+              <a:defRPr/>
+            </a:pPr>
+            <a:r>
+              <a:rPr lang="en-US" sz="3200" b="1" dirty="0">
+                <a:solidFill>
+                  <a:schemeClr val="tx1">
+                    <a:lumMod val="95000"/>
+                    <a:lumOff val="5000"/>
+                  </a:schemeClr>
+                </a:solidFill>
+                <a:latin typeface="+mj-lt"/>
+                <a:ea typeface="+mj-ea"/>
+                <a:cs typeface="+mj-cs"/>
+              </a:rPr>
+              <a:t>Login Screen</a:t>
+            </a:r>
+          </a:p>
+        </p:txBody>
+      </p:sp>
+      <p:pic>
+        <p:nvPicPr>
+          <p:cNvPr id="11" name="Picture 2">
+            <a:extLst>
+              <a:ext uri="{FF2B5EF4-FFF2-40B4-BE49-F238E27FC236}">
+                <a16:creationId xmlns:a16="http://schemas.microsoft.com/office/drawing/2014/main" id="{82728A80-2AC9-31C4-9021-2F0D76D422A9}"/>
+              </a:ext>
+            </a:extLst>
+          </p:cNvPr>
+          <p:cNvPicPr>
+            <a:picLocks noChangeAspect="1" noChangeArrowheads="1"/>
+          </p:cNvPicPr>
+          <p:nvPr/>
+        </p:nvPicPr>
+        <p:blipFill>
+          <a:blip r:embed="rId3" cstate="print"/>
+          <a:srcRect/>
+          <a:stretch>
+            <a:fillRect/>
+          </a:stretch>
+        </p:blipFill>
+        <p:spPr bwMode="auto">
+          <a:xfrm>
+            <a:off x="11100459" y="122550"/>
+            <a:ext cx="483679" cy="506506"/>
+          </a:xfrm>
+          <a:prstGeom prst="rect">
+            <a:avLst/>
+          </a:prstGeom>
+          <a:noFill/>
+          <a:ln w="9525">
+            <a:noFill/>
+            <a:miter lim="800000"/>
+            <a:headEnd/>
+            <a:tailEnd/>
+          </a:ln>
+          <a:effectLst/>
+        </p:spPr>
+      </p:pic>
+      <p:sp>
+        <p:nvSpPr>
+          <p:cNvPr id="16" name="Slide Number Placeholder 3">
+            <a:extLst>
+              <a:ext uri="{FF2B5EF4-FFF2-40B4-BE49-F238E27FC236}">
+                <a16:creationId xmlns:a16="http://schemas.microsoft.com/office/drawing/2014/main" id="{68ADFE92-6A4E-DF06-5F32-C417A92A9438}"/>
+              </a:ext>
+            </a:extLst>
+          </p:cNvPr>
+          <p:cNvSpPr txBox="1">
+            <a:spLocks/>
+          </p:cNvSpPr>
+          <p:nvPr/>
+        </p:nvSpPr>
+        <p:spPr>
+          <a:xfrm>
+            <a:off x="2055875" y="6608708"/>
+            <a:ext cx="7696200" cy="228600"/>
+          </a:xfrm>
+          <a:prstGeom prst="rect">
+            <a:avLst/>
+          </a:prstGeom>
+        </p:spPr>
+        <p:txBody>
+          <a:bodyPr vert="horz" lIns="91440" tIns="45720" rIns="91440" bIns="45720" rtlCol="0" anchor="ctr"/>
+          <a:lstStyle/>
+          <a:p>
+            <a:pPr algn="ctr"/>
+            <a:r>
+              <a:rPr lang="en-US" sz="1200" b="1" dirty="0">
+                <a:latin typeface="Times New Roman" panose="02020603050405020304" pitchFamily="18" charset="0"/>
+                <a:cs typeface="Times New Roman" pitchFamily="18" charset="0"/>
+              </a:rPr>
+              <a:t>Smart Waste Management System (SWMS)</a:t>
+            </a:r>
+            <a:endParaRPr lang="en-US" sz="1200" dirty="0">
+              <a:latin typeface="Times New Roman" panose="02020603050405020304" pitchFamily="18" charset="0"/>
+              <a:cs typeface="Times New Roman" panose="02020603050405020304" pitchFamily="18" charset="0"/>
+            </a:endParaRPr>
+          </a:p>
+        </p:txBody>
+      </p:sp>
+      <p:pic>
+        <p:nvPicPr>
+          <p:cNvPr id="5" name="Picture 4">
+            <a:extLst>
+              <a:ext uri="{FF2B5EF4-FFF2-40B4-BE49-F238E27FC236}">
+                <a16:creationId xmlns:a16="http://schemas.microsoft.com/office/drawing/2014/main" id="{C6565DB6-CF79-A3BA-EFBF-979B1B3BFC01}"/>
+              </a:ext>
+            </a:extLst>
+          </p:cNvPr>
+          <p:cNvPicPr>
+            <a:picLocks noChangeAspect="1"/>
+          </p:cNvPicPr>
+          <p:nvPr/>
+        </p:nvPicPr>
+        <p:blipFill>
+          <a:blip r:embed="rId4"/>
+          <a:stretch>
+            <a:fillRect/>
+          </a:stretch>
+        </p:blipFill>
+        <p:spPr>
+          <a:xfrm>
+            <a:off x="1293875" y="1363444"/>
+            <a:ext cx="9220200" cy="4435553"/>
+          </a:xfrm>
+          <a:prstGeom prst="rect">
+            <a:avLst/>
+          </a:prstGeom>
+        </p:spPr>
+      </p:pic>
+    </p:spTree>
+    <p:extLst>
+      <p:ext uri="{BB962C8B-B14F-4D97-AF65-F5344CB8AC3E}">
+        <p14:creationId xmlns:p14="http://schemas.microsoft.com/office/powerpoint/2010/main" val="1853311162"/>
+      </p:ext>
+    </p:extLst>
+  </p:cSld>
+  <p:clrMapOvr>
+    <a:masterClrMapping/>
+  </p:clrMapOvr>
+</p:sld>
+</file>
+
+<file path=ppt/slides/slide41.xml><?xml version="1.0" encoding="utf-8"?>
+<p:sld xmlns:a="http://schemas.openxmlformats.org/drawingml/2006/main" xmlns:r="http://schemas.openxmlformats.org/officeDocument/2006/relationships" xmlns:p="http://schemas.openxmlformats.org/presentationml/2006/main">
+  <p:cSld>
+    <p:spTree>
+      <p:nvGrpSpPr>
+        <p:cNvPr id="1" name="">
+          <a:extLst>
+            <a:ext uri="{FF2B5EF4-FFF2-40B4-BE49-F238E27FC236}">
               <a16:creationId xmlns:a16="http://schemas.microsoft.com/office/drawing/2014/main" id="{66F4C057-3FC3-F4EB-4CC3-585B37598F4B}"/>
             </a:ext>
           </a:extLst>
@@ -19019,7 +19021,7 @@
               <a:pPr algn="r">
                 <a:defRPr/>
               </a:pPr>
-              <a:t>40</a:t>
+              <a:t>41</a:t>
             </a:fld>
             <a:endParaRPr lang="en-US" sz="1200" dirty="0">
               <a:latin typeface="Rockwell" pitchFamily="18" charset="0"/>
@@ -19242,7 +19244,7 @@
 </p:sld>
 </file>
 
-<file path=ppt/slides/slide41.xml><?xml version="1.0" encoding="utf-8"?>
+<file path=ppt/slides/slide42.xml><?xml version="1.0" encoding="utf-8"?>
 <p:sld xmlns:a="http://schemas.openxmlformats.org/drawingml/2006/main" xmlns:r="http://schemas.openxmlformats.org/officeDocument/2006/relationships" xmlns:p="http://schemas.openxmlformats.org/presentationml/2006/main">
   <p:cSld>
     <p:spTree>
@@ -19384,7 +19386,7 @@
               <a:pPr algn="r">
                 <a:defRPr/>
               </a:pPr>
-              <a:t>41</a:t>
+              <a:t>42</a:t>
             </a:fld>
             <a:endParaRPr lang="en-US" sz="1200" dirty="0">
               <a:latin typeface="Rockwell" pitchFamily="18" charset="0"/>
@@ -19607,7 +19609,7 @@
 </p:sld>
 </file>
 
-<file path=ppt/slides/slide42.xml><?xml version="1.0" encoding="utf-8"?>
+<file path=ppt/slides/slide43.xml><?xml version="1.0" encoding="utf-8"?>
 <p:sld xmlns:a="http://schemas.openxmlformats.org/drawingml/2006/main" xmlns:r="http://schemas.openxmlformats.org/officeDocument/2006/relationships" xmlns:p="http://schemas.openxmlformats.org/presentationml/2006/main">
   <p:cSld>
     <p:spTree>
@@ -19749,7 +19751,7 @@
               <a:pPr algn="r">
                 <a:defRPr/>
               </a:pPr>
-              <a:t>42</a:t>
+              <a:t>43</a:t>
             </a:fld>
             <a:endParaRPr lang="en-US" sz="1200" dirty="0">
               <a:latin typeface="Rockwell" pitchFamily="18" charset="0"/>
@@ -19972,7 +19974,7 @@
 </p:sld>
 </file>
 
-<file path=ppt/slides/slide43.xml><?xml version="1.0" encoding="utf-8"?>
+<file path=ppt/slides/slide44.xml><?xml version="1.0" encoding="utf-8"?>
 <p:sld xmlns:a="http://schemas.openxmlformats.org/drawingml/2006/main" xmlns:r="http://schemas.openxmlformats.org/officeDocument/2006/relationships" xmlns:p="http://schemas.openxmlformats.org/presentationml/2006/main">
   <p:cSld>
     <p:spTree>
@@ -20114,7 +20116,7 @@
               <a:pPr algn="r">
                 <a:defRPr/>
               </a:pPr>
-              <a:t>43</a:t>
+              <a:t>44</a:t>
             </a:fld>
             <a:endParaRPr lang="en-US" sz="1200" dirty="0">
               <a:latin typeface="Rockwell" pitchFamily="18" charset="0"/>
@@ -20337,7 +20339,7 @@
 </p:sld>
 </file>
 
-<file path=ppt/slides/slide44.xml><?xml version="1.0" encoding="utf-8"?>
+<file path=ppt/slides/slide45.xml><?xml version="1.0" encoding="utf-8"?>
 <p:sld xmlns:a="http://schemas.openxmlformats.org/drawingml/2006/main" xmlns:r="http://schemas.openxmlformats.org/officeDocument/2006/relationships" xmlns:p="http://schemas.openxmlformats.org/presentationml/2006/main">
   <p:cSld>
     <p:spTree>
@@ -20479,7 +20481,7 @@
               <a:pPr algn="r">
                 <a:defRPr/>
               </a:pPr>
-              <a:t>44</a:t>
+              <a:t>45</a:t>
             </a:fld>
             <a:endParaRPr lang="en-US" sz="1200" dirty="0">
               <a:latin typeface="Rockwell" pitchFamily="18" charset="0"/>
@@ -20695,432 +20697,6 @@
         <p14:creationId xmlns:p14="http://schemas.microsoft.com/office/powerpoint/2010/main" val="1272474681"/>
       </p:ext>
     </p:extLst>
-  </p:cSld>
-  <p:clrMapOvr>
-    <a:masterClrMapping/>
-  </p:clrMapOvr>
-</p:sld>
-</file>
-
-<file path=ppt/slides/slide45.xml><?xml version="1.0" encoding="utf-8"?>
-<p:sld xmlns:a="http://schemas.openxmlformats.org/drawingml/2006/main" xmlns:r="http://schemas.openxmlformats.org/officeDocument/2006/relationships" xmlns:p="http://schemas.openxmlformats.org/presentationml/2006/main">
-  <p:cSld>
-    <p:spTree>
-      <p:nvGrpSpPr>
-        <p:cNvPr id="1" name=""/>
-        <p:cNvGrpSpPr/>
-        <p:nvPr/>
-      </p:nvGrpSpPr>
-      <p:grpSpPr>
-        <a:xfrm>
-          <a:off x="0" y="0"/>
-          <a:ext cx="0" cy="0"/>
-          <a:chOff x="0" y="0"/>
-          <a:chExt cx="0" cy="0"/>
-        </a:xfrm>
-      </p:grpSpPr>
-      <p:sp>
-        <p:nvSpPr>
-          <p:cNvPr id="3" name="Content Placeholder 2"/>
-          <p:cNvSpPr>
-            <a:spLocks noGrp="1"/>
-          </p:cNvSpPr>
-          <p:nvPr>
-            <p:ph idx="1"/>
-          </p:nvPr>
-        </p:nvSpPr>
-        <p:spPr>
-          <a:xfrm>
-            <a:off x="533400" y="838200"/>
-            <a:ext cx="11050738" cy="3276600"/>
-          </a:xfrm>
-        </p:spPr>
-        <p:txBody>
-          <a:bodyPr>
-            <a:noAutofit/>
-          </a:bodyPr>
-          <a:lstStyle/>
-          <a:p>
-            <a:pPr marL="0" indent="0" algn="just">
-              <a:buNone/>
-            </a:pPr>
-            <a:r>
-              <a:rPr lang="en-US" sz="1800" dirty="0">
-                <a:latin typeface="Times New Roman" panose="02020603050405020304" pitchFamily="18" charset="0"/>
-                <a:cs typeface="Times New Roman" panose="02020603050405020304" pitchFamily="18" charset="0"/>
-              </a:rPr>
-              <a:t>SWMS demonstrates how computer vision + structured data management can modernize waste operations.</a:t>
-            </a:r>
-          </a:p>
-          <a:p>
-            <a:r>
-              <a:rPr lang="en-US" sz="1800" dirty="0">
-                <a:latin typeface="Times New Roman" panose="02020603050405020304" pitchFamily="18" charset="0"/>
-                <a:cs typeface="Times New Roman" panose="02020603050405020304" pitchFamily="18" charset="0"/>
-              </a:rPr>
-              <a:t>Delivered a fully working desktop prototype covering detection, fleet, alerts, and reporting.</a:t>
-            </a:r>
-          </a:p>
-          <a:p>
-            <a:r>
-              <a:rPr lang="en-US" sz="1800" dirty="0">
-                <a:latin typeface="Times New Roman" panose="02020603050405020304" pitchFamily="18" charset="0"/>
-                <a:cs typeface="Times New Roman" panose="02020603050405020304" pitchFamily="18" charset="0"/>
-              </a:rPr>
-              <a:t>Built on a modular, scalable architecture ready for future enhancements:</a:t>
-            </a:r>
-          </a:p>
-          <a:p>
-            <a:pPr lvl="1">
-              <a:buFont typeface="Courier New" panose="02070309020205020404" pitchFamily="49" charset="0"/>
-              <a:buChar char="o"/>
-            </a:pPr>
-            <a:r>
-              <a:rPr lang="en-US" sz="1800" dirty="0">
-                <a:latin typeface="Times New Roman" panose="02020603050405020304" pitchFamily="18" charset="0"/>
-                <a:cs typeface="Times New Roman" panose="02020603050405020304" pitchFamily="18" charset="0"/>
-              </a:rPr>
-              <a:t>Cloud sync &amp; multi-tenant support</a:t>
-            </a:r>
-          </a:p>
-          <a:p>
-            <a:pPr lvl="1">
-              <a:buFont typeface="Courier New" panose="02070309020205020404" pitchFamily="49" charset="0"/>
-              <a:buChar char="o"/>
-            </a:pPr>
-            <a:r>
-              <a:rPr lang="en-US" sz="1800" dirty="0">
-                <a:latin typeface="Times New Roman" panose="02020603050405020304" pitchFamily="18" charset="0"/>
-                <a:cs typeface="Times New Roman" panose="02020603050405020304" pitchFamily="18" charset="0"/>
-              </a:rPr>
-              <a:t>Mobile companion app</a:t>
-            </a:r>
-          </a:p>
-          <a:p>
-            <a:pPr lvl="1">
-              <a:buFont typeface="Courier New" panose="02070309020205020404" pitchFamily="49" charset="0"/>
-              <a:buChar char="o"/>
-            </a:pPr>
-            <a:r>
-              <a:rPr lang="en-US" sz="1800" dirty="0">
-                <a:latin typeface="Times New Roman" panose="02020603050405020304" pitchFamily="18" charset="0"/>
-                <a:cs typeface="Times New Roman" panose="02020603050405020304" pitchFamily="18" charset="0"/>
-              </a:rPr>
-              <a:t>IoT bin sensors</a:t>
-            </a:r>
-          </a:p>
-          <a:p>
-            <a:pPr lvl="1">
-              <a:buFont typeface="Courier New" panose="02070309020205020404" pitchFamily="49" charset="0"/>
-              <a:buChar char="o"/>
-            </a:pPr>
-            <a:r>
-              <a:rPr lang="en-US" sz="1800" dirty="0">
-                <a:latin typeface="Times New Roman" panose="02020603050405020304" pitchFamily="18" charset="0"/>
-                <a:cs typeface="Times New Roman" panose="02020603050405020304" pitchFamily="18" charset="0"/>
-              </a:rPr>
-              <a:t>Advanced predictive analytics</a:t>
-            </a:r>
-          </a:p>
-          <a:p>
-            <a:r>
-              <a:rPr lang="en-US" sz="1800" dirty="0">
-                <a:latin typeface="Times New Roman" panose="02020603050405020304" pitchFamily="18" charset="0"/>
-                <a:cs typeface="Times New Roman" panose="02020603050405020304" pitchFamily="18" charset="0"/>
-              </a:rPr>
-              <a:t>The project successfully validates the feasibility of an affordable, offline-capable smart waste solution.</a:t>
-            </a:r>
-          </a:p>
-        </p:txBody>
-      </p:sp>
-      <p:sp>
-        <p:nvSpPr>
-          <p:cNvPr id="6" name="Slide Number Placeholder 3"/>
-          <p:cNvSpPr txBox="1">
-            <a:spLocks/>
-          </p:cNvSpPr>
-          <p:nvPr/>
-        </p:nvSpPr>
-        <p:spPr>
-          <a:xfrm>
-            <a:off x="8534400" y="6629400"/>
-            <a:ext cx="2133600" cy="228600"/>
-          </a:xfrm>
-          <a:prstGeom prst="rect">
-            <a:avLst/>
-          </a:prstGeom>
-        </p:spPr>
-        <p:txBody>
-          <a:bodyPr vert="horz" lIns="91440" tIns="45720" rIns="91440" bIns="45720" rtlCol="0" anchor="ctr"/>
-          <a:lstStyle/>
-          <a:p>
-            <a:pPr algn="r">
-              <a:defRPr/>
-            </a:pPr>
-            <a:fld id="{B6F15528-21DE-4FAA-801E-634DDDAF4B2B}" type="slidenum">
-              <a:rPr lang="en-US" sz="1200">
-                <a:latin typeface="Rockwell" pitchFamily="18" charset="0"/>
-              </a:rPr>
-              <a:pPr algn="r">
-                <a:defRPr/>
-              </a:pPr>
-              <a:t>45</a:t>
-            </a:fld>
-            <a:endParaRPr lang="en-US" sz="1200" dirty="0">
-              <a:latin typeface="Rockwell" pitchFamily="18" charset="0"/>
-            </a:endParaRPr>
-          </a:p>
-        </p:txBody>
-      </p:sp>
-      <p:sp>
-        <p:nvSpPr>
-          <p:cNvPr id="10" name="Slide Number Placeholder 3"/>
-          <p:cNvSpPr txBox="1">
-            <a:spLocks/>
-          </p:cNvSpPr>
-          <p:nvPr/>
-        </p:nvSpPr>
-        <p:spPr>
-          <a:xfrm>
-            <a:off x="1524000" y="6629400"/>
-            <a:ext cx="7696200" cy="228600"/>
-          </a:xfrm>
-          <a:prstGeom prst="rect">
-            <a:avLst/>
-          </a:prstGeom>
-        </p:spPr>
-        <p:txBody>
-          <a:bodyPr vert="horz" lIns="91440" tIns="45720" rIns="91440" bIns="45720" rtlCol="0" anchor="ctr"/>
-          <a:lstStyle/>
-          <a:p>
-            <a:pPr algn="ctr"/>
-            <a:r>
-              <a:rPr lang="en-US" sz="1200" b="1" dirty="0">
-                <a:latin typeface="Times New Roman" panose="02020603050405020304" pitchFamily="18" charset="0"/>
-                <a:cs typeface="Times New Roman" pitchFamily="18" charset="0"/>
-              </a:rPr>
-              <a:t>Smart Waste Management System (SWMS)</a:t>
-            </a:r>
-            <a:endParaRPr lang="en-US" sz="1200" dirty="0">
-              <a:latin typeface="Times New Roman" panose="02020603050405020304" pitchFamily="18" charset="0"/>
-              <a:cs typeface="Times New Roman" panose="02020603050405020304" pitchFamily="18" charset="0"/>
-            </a:endParaRPr>
-          </a:p>
-        </p:txBody>
-      </p:sp>
-      <p:sp>
-        <p:nvSpPr>
-          <p:cNvPr id="12" name="Title 1">
-            <a:extLst>
-              <a:ext uri="{FF2B5EF4-FFF2-40B4-BE49-F238E27FC236}">
-                <a16:creationId xmlns:a16="http://schemas.microsoft.com/office/drawing/2014/main" id="{9380301D-C2FB-CCEB-FB5A-5CBF636818D9}"/>
-              </a:ext>
-            </a:extLst>
-          </p:cNvPr>
-          <p:cNvSpPr>
-            <a:spLocks noGrp="1"/>
-          </p:cNvSpPr>
-          <p:nvPr>
-            <p:ph type="title"/>
-          </p:nvPr>
-        </p:nvSpPr>
-        <p:spPr>
-          <a:xfrm>
-            <a:off x="2133600" y="171857"/>
-            <a:ext cx="7924800" cy="457201"/>
-          </a:xfrm>
-        </p:spPr>
-        <p:txBody>
-          <a:bodyPr>
-            <a:noAutofit/>
-          </a:bodyPr>
-          <a:lstStyle/>
-          <a:p>
-            <a:pPr algn="ctr"/>
-            <a:br>
-              <a:rPr lang="en-US" sz="3200" b="1" dirty="0"/>
-            </a:br>
-            <a:br>
-              <a:rPr lang="en-US" sz="3200" b="1" dirty="0"/>
-            </a:br>
-            <a:br>
-              <a:rPr lang="en-US" sz="3200" b="1" dirty="0"/>
-            </a:br>
-            <a:br>
-              <a:rPr lang="en-US" sz="3200" b="1" dirty="0"/>
-            </a:br>
-            <a:br>
-              <a:rPr lang="en-US" sz="3200" b="1" dirty="0"/>
-            </a:br>
-            <a:br>
-              <a:rPr lang="en-US" sz="3200" b="1" dirty="0"/>
-            </a:br>
-            <a:br>
-              <a:rPr lang="en-US" sz="3200" b="1" dirty="0"/>
-            </a:br>
-            <a:br>
-              <a:rPr lang="en-US" sz="3200" b="1" dirty="0"/>
-            </a:br>
-            <a:br>
-              <a:rPr lang="en-US" sz="3200" b="1" dirty="0"/>
-            </a:br>
-            <a:br>
-              <a:rPr lang="en-US" sz="3200" b="1" dirty="0"/>
-            </a:br>
-            <a:r>
-              <a:rPr lang="en-US" sz="3200" b="1" dirty="0"/>
-              <a:t>                     </a:t>
-            </a:r>
-            <a:br>
-              <a:rPr lang="en-US" sz="3200" b="1" dirty="0"/>
-            </a:br>
-            <a:br>
-              <a:rPr lang="en-US" sz="3200" b="1" dirty="0"/>
-            </a:br>
-            <a:br>
-              <a:rPr lang="en-US" sz="3200" b="1" dirty="0"/>
-            </a:br>
-            <a:br>
-              <a:rPr lang="en-US" sz="3200" b="1" dirty="0"/>
-            </a:br>
-            <a:br>
-              <a:rPr lang="en-US" sz="3200" b="1" dirty="0"/>
-            </a:br>
-            <a:endParaRPr lang="en-US" sz="3200" b="1" dirty="0"/>
-          </a:p>
-        </p:txBody>
-      </p:sp>
-      <p:pic>
-        <p:nvPicPr>
-          <p:cNvPr id="13" name="Picture 4">
-            <a:extLst>
-              <a:ext uri="{FF2B5EF4-FFF2-40B4-BE49-F238E27FC236}">
-                <a16:creationId xmlns:a16="http://schemas.microsoft.com/office/drawing/2014/main" id="{1DE960E5-FF35-9EDD-969F-C0694B5F1AAF}"/>
-              </a:ext>
-            </a:extLst>
-          </p:cNvPr>
-          <p:cNvPicPr>
-            <a:picLocks noChangeAspect="1" noChangeArrowheads="1"/>
-          </p:cNvPicPr>
-          <p:nvPr/>
-        </p:nvPicPr>
-        <p:blipFill>
-          <a:blip r:embed="rId2"/>
-          <a:srcRect/>
-          <a:stretch>
-            <a:fillRect/>
-          </a:stretch>
-        </p:blipFill>
-        <p:spPr bwMode="auto">
-          <a:xfrm>
-            <a:off x="533400" y="91480"/>
-            <a:ext cx="609600" cy="539014"/>
-          </a:xfrm>
-          <a:prstGeom prst="rect">
-            <a:avLst/>
-          </a:prstGeom>
-          <a:noFill/>
-          <a:ln w="9525">
-            <a:noFill/>
-            <a:miter lim="800000"/>
-            <a:headEnd/>
-            <a:tailEnd/>
-          </a:ln>
-          <a:effectLst/>
-        </p:spPr>
-      </p:pic>
-      <p:sp>
-        <p:nvSpPr>
-          <p:cNvPr id="14" name="Title 1">
-            <a:extLst>
-              <a:ext uri="{FF2B5EF4-FFF2-40B4-BE49-F238E27FC236}">
-                <a16:creationId xmlns:a16="http://schemas.microsoft.com/office/drawing/2014/main" id="{9273AB02-C084-AA6E-F2F1-F54E1B680830}"/>
-              </a:ext>
-            </a:extLst>
-          </p:cNvPr>
-          <p:cNvSpPr txBox="1">
-            <a:spLocks/>
-          </p:cNvSpPr>
-          <p:nvPr/>
-        </p:nvSpPr>
-        <p:spPr>
-          <a:xfrm>
-            <a:off x="1880616" y="171856"/>
-            <a:ext cx="8046720" cy="457200"/>
-          </a:xfrm>
-          <a:prstGeom prst="rect">
-            <a:avLst/>
-          </a:prstGeom>
-        </p:spPr>
-        <p:txBody>
-          <a:bodyPr vert="horz" lIns="91440" tIns="45720" rIns="91440" bIns="45720" rtlCol="0" anchor="ctr">
-            <a:noAutofit/>
-          </a:bodyPr>
-          <a:lstStyle/>
-          <a:p>
-            <a:pPr algn="ctr">
-              <a:spcBef>
-                <a:spcPct val="0"/>
-              </a:spcBef>
-              <a:defRPr/>
-            </a:pPr>
-            <a:r>
-              <a:rPr lang="en-US" sz="3200" b="1" dirty="0">
-                <a:solidFill>
-                  <a:schemeClr val="tx1">
-                    <a:lumMod val="95000"/>
-                    <a:lumOff val="5000"/>
-                  </a:schemeClr>
-                </a:solidFill>
-                <a:latin typeface="+mj-lt"/>
-                <a:ea typeface="+mj-ea"/>
-                <a:cs typeface="+mj-cs"/>
-              </a:rPr>
-              <a:t>Conclusion</a:t>
-            </a:r>
-          </a:p>
-        </p:txBody>
-      </p:sp>
-      <p:pic>
-        <p:nvPicPr>
-          <p:cNvPr id="15" name="Picture 2">
-            <a:extLst>
-              <a:ext uri="{FF2B5EF4-FFF2-40B4-BE49-F238E27FC236}">
-                <a16:creationId xmlns:a16="http://schemas.microsoft.com/office/drawing/2014/main" id="{02CF62C1-2383-F445-35E0-46DA1FB194D9}"/>
-              </a:ext>
-            </a:extLst>
-          </p:cNvPr>
-          <p:cNvPicPr>
-            <a:picLocks noChangeAspect="1" noChangeArrowheads="1"/>
-          </p:cNvPicPr>
-          <p:nvPr/>
-        </p:nvPicPr>
-        <p:blipFill>
-          <a:blip r:embed="rId3" cstate="print"/>
-          <a:srcRect/>
-          <a:stretch>
-            <a:fillRect/>
-          </a:stretch>
-        </p:blipFill>
-        <p:spPr bwMode="auto">
-          <a:xfrm>
-            <a:off x="11100459" y="122550"/>
-            <a:ext cx="483679" cy="506506"/>
-          </a:xfrm>
-          <a:prstGeom prst="rect">
-            <a:avLst/>
-          </a:prstGeom>
-          <a:noFill/>
-          <a:ln w="9525">
-            <a:noFill/>
-            <a:miter lim="800000"/>
-            <a:headEnd/>
-            <a:tailEnd/>
-          </a:ln>
-          <a:effectLst/>
-        </p:spPr>
-      </p:pic>
-    </p:spTree>
   </p:cSld>
   <p:clrMapOvr>
     <a:masterClrMapping/>
@@ -21147,18 +20723,18 @@
       </p:grpSpPr>
       <p:sp>
         <p:nvSpPr>
-          <p:cNvPr id="2" name="Title 1"/>
+          <p:cNvPr id="3" name="Content Placeholder 2"/>
           <p:cNvSpPr>
             <a:spLocks noGrp="1"/>
           </p:cNvSpPr>
           <p:nvPr>
-            <p:ph type="title"/>
+            <p:ph idx="1"/>
           </p:nvPr>
         </p:nvSpPr>
         <p:spPr>
           <a:xfrm>
-            <a:off x="2133600" y="152400"/>
-            <a:ext cx="7924800" cy="457200"/>
+            <a:off x="533400" y="838200"/>
+            <a:ext cx="11050738" cy="3276600"/>
           </a:xfrm>
         </p:spPr>
         <p:txBody>
@@ -21167,300 +20743,94 @@
           </a:bodyPr>
           <a:lstStyle/>
           <a:p>
-            <a:pPr algn="ctr"/>
-            <a:r>
-              <a:rPr lang="en-US" sz="3200" b="1" dirty="0"/>
-              <a:t>References</a:t>
-            </a:r>
-          </a:p>
-        </p:txBody>
-      </p:sp>
-      <p:sp>
-        <p:nvSpPr>
-          <p:cNvPr id="3" name="Content Placeholder 2"/>
-          <p:cNvSpPr>
-            <a:spLocks noGrp="1"/>
-          </p:cNvSpPr>
-          <p:nvPr>
-            <p:ph idx="1"/>
-          </p:nvPr>
-        </p:nvSpPr>
-        <p:spPr>
-          <a:xfrm>
-            <a:off x="1752600" y="762000"/>
-            <a:ext cx="8763000" cy="5791200"/>
-          </a:xfrm>
-        </p:spPr>
-        <p:txBody>
-          <a:bodyPr>
-            <a:normAutofit fontScale="32500" lnSpcReduction="20000"/>
-          </a:bodyPr>
-          <a:lstStyle/>
-          <a:p>
-            <a:pPr marL="514350" indent="-514350" algn="just">
-              <a:lnSpc>
-                <a:spcPct val="220000"/>
-              </a:lnSpc>
-              <a:buFont typeface="+mj-lt"/>
-              <a:buAutoNum type="arabicPeriod"/>
+            <a:pPr marL="0" indent="0" algn="just">
+              <a:buNone/>
             </a:pPr>
             <a:r>
-              <a:rPr lang="en-US" dirty="0">
+              <a:rPr lang="en-US" sz="1800" dirty="0">
                 <a:latin typeface="Times New Roman" panose="02020603050405020304" pitchFamily="18" charset="0"/>
                 <a:cs typeface="Times New Roman" panose="02020603050405020304" pitchFamily="18" charset="0"/>
               </a:rPr>
-              <a:t>Adedeji, O. and Wang, Z. (2019) 'Intelligent waste classification system using deep learning convolutional neural network', Procedia Manufacturing, 35, pp. 607-612. doi: 10.1016/j.promfg.2019.05.086</a:t>
-            </a:r>
-          </a:p>
-          <a:p>
-            <a:pPr marL="514350" indent="-514350" algn="just">
-              <a:lnSpc>
-                <a:spcPct val="220000"/>
-              </a:lnSpc>
-              <a:buFont typeface="+mj-lt"/>
-              <a:buAutoNum type="arabicPeriod"/>
-            </a:pPr>
-            <a:r>
-              <a:rPr lang="en-US" dirty="0">
+              <a:t>SWMS demonstrates how computer vision + structured data management can modernize waste operations.</a:t>
+            </a:r>
+          </a:p>
+          <a:p>
+            <a:r>
+              <a:rPr lang="en-US" sz="1800" dirty="0">
                 <a:latin typeface="Times New Roman" panose="02020603050405020304" pitchFamily="18" charset="0"/>
                 <a:cs typeface="Times New Roman" panose="02020603050405020304" pitchFamily="18" charset="0"/>
               </a:rPr>
-              <a:t>Banerjee, A. and Watson, T. F. (2011) Pickard's manual of operative dentistry. 9th </a:t>
-            </a:r>
-            <a:r>
-              <a:rPr lang="en-US" dirty="0" err="1">
+              <a:t>Delivered a fully working desktop prototype covering detection, fleet, alerts, and reporting.</a:t>
+            </a:r>
+          </a:p>
+          <a:p>
+            <a:r>
+              <a:rPr lang="en-US" sz="1800" dirty="0">
                 <a:latin typeface="Times New Roman" panose="02020603050405020304" pitchFamily="18" charset="0"/>
                 <a:cs typeface="Times New Roman" panose="02020603050405020304" pitchFamily="18" charset="0"/>
               </a:rPr>
-              <a:t>edn</a:t>
-            </a:r>
-            <a:r>
-              <a:rPr lang="en-US" dirty="0">
+              <a:t>Built on a modular, scalable architecture ready for future enhancements:</a:t>
+            </a:r>
+          </a:p>
+          <a:p>
+            <a:pPr lvl="1">
+              <a:buFont typeface="Courier New" panose="02070309020205020404" pitchFamily="49" charset="0"/>
+              <a:buChar char="o"/>
+            </a:pPr>
+            <a:r>
+              <a:rPr lang="en-US" sz="1800" dirty="0">
                 <a:latin typeface="Times New Roman" panose="02020603050405020304" pitchFamily="18" charset="0"/>
                 <a:cs typeface="Times New Roman" panose="02020603050405020304" pitchFamily="18" charset="0"/>
               </a:rPr>
-              <a:t>. Oxford: Oxford University Press.</a:t>
-            </a:r>
-          </a:p>
-          <a:p>
-            <a:pPr marL="514350" indent="-514350" algn="just">
-              <a:lnSpc>
-                <a:spcPct val="220000"/>
-              </a:lnSpc>
-              <a:buFont typeface="+mj-lt"/>
-              <a:buAutoNum type="arabicPeriod"/>
+              <a:t>Cloud sync &amp; multi-tenant support</a:t>
+            </a:r>
+          </a:p>
+          <a:p>
+            <a:pPr lvl="1">
+              <a:buFont typeface="Courier New" panose="02070309020205020404" pitchFamily="49" charset="0"/>
+              <a:buChar char="o"/>
             </a:pPr>
             <a:r>
-              <a:rPr lang="en-US" dirty="0">
+              <a:rPr lang="en-US" sz="1800" dirty="0">
                 <a:latin typeface="Times New Roman" panose="02020603050405020304" pitchFamily="18" charset="0"/>
                 <a:cs typeface="Times New Roman" panose="02020603050405020304" pitchFamily="18" charset="0"/>
               </a:rPr>
-              <a:t>Beazley, D. and Jones, B. K. (2013) Python cookbook. 3rd </a:t>
-            </a:r>
-            <a:r>
-              <a:rPr lang="en-US" dirty="0" err="1">
+              <a:t>Mobile companion app</a:t>
+            </a:r>
+          </a:p>
+          <a:p>
+            <a:pPr lvl="1">
+              <a:buFont typeface="Courier New" panose="02070309020205020404" pitchFamily="49" charset="0"/>
+              <a:buChar char="o"/>
+            </a:pPr>
+            <a:r>
+              <a:rPr lang="en-US" sz="1800" dirty="0">
                 <a:latin typeface="Times New Roman" panose="02020603050405020304" pitchFamily="18" charset="0"/>
                 <a:cs typeface="Times New Roman" panose="02020603050405020304" pitchFamily="18" charset="0"/>
               </a:rPr>
-              <a:t>edn</a:t>
-            </a:r>
-            <a:r>
-              <a:rPr lang="en-US" dirty="0">
+              <a:t>IoT bin sensors</a:t>
+            </a:r>
+          </a:p>
+          <a:p>
+            <a:pPr lvl="1">
+              <a:buFont typeface="Courier New" panose="02070309020205020404" pitchFamily="49" charset="0"/>
+              <a:buChar char="o"/>
+            </a:pPr>
+            <a:r>
+              <a:rPr lang="en-US" sz="1800" dirty="0">
                 <a:latin typeface="Times New Roman" panose="02020603050405020304" pitchFamily="18" charset="0"/>
                 <a:cs typeface="Times New Roman" panose="02020603050405020304" pitchFamily="18" charset="0"/>
               </a:rPr>
-              <a:t>. Sebastopol: O'Reilly Media.</a:t>
-            </a:r>
-          </a:p>
-          <a:p>
-            <a:pPr marL="514350" indent="-514350" algn="just">
-              <a:lnSpc>
-                <a:spcPct val="220000"/>
-              </a:lnSpc>
-              <a:buFont typeface="+mj-lt"/>
-              <a:buAutoNum type="arabicPeriod"/>
-            </a:pPr>
-            <a:r>
-              <a:rPr lang="en-US" dirty="0" err="1">
+              <a:t>Advanced predictive analytics</a:t>
+            </a:r>
+          </a:p>
+          <a:p>
+            <a:r>
+              <a:rPr lang="en-US" sz="1800" dirty="0">
                 <a:latin typeface="Times New Roman" panose="02020603050405020304" pitchFamily="18" charset="0"/>
                 <a:cs typeface="Times New Roman" panose="02020603050405020304" pitchFamily="18" charset="0"/>
               </a:rPr>
-              <a:t>Bushnag</a:t>
-            </a:r>
-            <a:r>
-              <a:rPr lang="en-US" dirty="0">
-                <a:latin typeface="Times New Roman" panose="02020603050405020304" pitchFamily="18" charset="0"/>
-                <a:cs typeface="Times New Roman" panose="02020603050405020304" pitchFamily="18" charset="0"/>
-              </a:rPr>
-              <a:t>, A. (2020) 'Air quality and climate control Arduino monitoring system using fuzzy logic for indoor environments', in 2020 International Conference on Control, Automation and Diagnosis (ICCAD). IEEE, pp. 1-6. doi: 10.1109/ICCAD49821.2020.9260552</a:t>
-            </a:r>
-          </a:p>
-          <a:p>
-            <a:pPr marL="514350" indent="-514350" algn="just">
-              <a:lnSpc>
-                <a:spcPct val="220000"/>
-              </a:lnSpc>
-              <a:buFont typeface="+mj-lt"/>
-              <a:buAutoNum type="arabicPeriod"/>
-            </a:pPr>
-            <a:r>
-              <a:rPr lang="en-US" dirty="0">
-                <a:latin typeface="Times New Roman" panose="02020603050405020304" pitchFamily="18" charset="0"/>
-                <a:cs typeface="Times New Roman" panose="02020603050405020304" pitchFamily="18" charset="0"/>
-              </a:rPr>
-              <a:t>Department of Environment, Bangladesh (2021) State of solid waste management in Bangladesh: 2021 status report. Dhaka: Government of Bangladesh.</a:t>
-            </a:r>
-          </a:p>
-          <a:p>
-            <a:pPr marL="514350" indent="-514350" algn="just">
-              <a:lnSpc>
-                <a:spcPct val="220000"/>
-              </a:lnSpc>
-              <a:buFont typeface="+mj-lt"/>
-              <a:buAutoNum type="arabicPeriod"/>
-            </a:pPr>
-            <a:r>
-              <a:rPr lang="en-US" dirty="0">
-                <a:latin typeface="Times New Roman" panose="02020603050405020304" pitchFamily="18" charset="0"/>
-                <a:cs typeface="Times New Roman" panose="02020603050405020304" pitchFamily="18" charset="0"/>
-              </a:rPr>
-              <a:t>Hossain, M. S. and Rahman, A. (2020) 'A study on solid waste management in Dhaka city', Journal of Environmental Science and Sustainable Development, 3(2), pp. 45-58.</a:t>
-            </a:r>
-          </a:p>
-          <a:p>
-            <a:pPr marL="514350" indent="-514350" algn="just">
-              <a:lnSpc>
-                <a:spcPct val="220000"/>
-              </a:lnSpc>
-              <a:buFont typeface="+mj-lt"/>
-              <a:buAutoNum type="arabicPeriod"/>
-            </a:pPr>
-            <a:r>
-              <a:rPr lang="en-US" dirty="0">
-                <a:latin typeface="Times New Roman" panose="02020603050405020304" pitchFamily="18" charset="0"/>
-                <a:cs typeface="Times New Roman" panose="02020603050405020304" pitchFamily="18" charset="0"/>
-              </a:rPr>
-              <a:t>Kaza, S., Yao, L., </a:t>
-            </a:r>
-            <a:r>
-              <a:rPr lang="en-US" dirty="0" err="1">
-                <a:latin typeface="Times New Roman" panose="02020603050405020304" pitchFamily="18" charset="0"/>
-                <a:cs typeface="Times New Roman" panose="02020603050405020304" pitchFamily="18" charset="0"/>
-              </a:rPr>
-              <a:t>Bhada</a:t>
-            </a:r>
-            <a:r>
-              <a:rPr lang="en-US" dirty="0">
-                <a:latin typeface="Times New Roman" panose="02020603050405020304" pitchFamily="18" charset="0"/>
-                <a:cs typeface="Times New Roman" panose="02020603050405020304" pitchFamily="18" charset="0"/>
-              </a:rPr>
-              <a:t>-Tata, P. and Van </a:t>
-            </a:r>
-            <a:r>
-              <a:rPr lang="en-US" dirty="0" err="1">
-                <a:latin typeface="Times New Roman" panose="02020603050405020304" pitchFamily="18" charset="0"/>
-                <a:cs typeface="Times New Roman" panose="02020603050405020304" pitchFamily="18" charset="0"/>
-              </a:rPr>
-              <a:t>Woerden</a:t>
-            </a:r>
-            <a:r>
-              <a:rPr lang="en-US" dirty="0">
-                <a:latin typeface="Times New Roman" panose="02020603050405020304" pitchFamily="18" charset="0"/>
-                <a:cs typeface="Times New Roman" panose="02020603050405020304" pitchFamily="18" charset="0"/>
-              </a:rPr>
-              <a:t>, F. (2018) What a Waste 2.0: A global snapshot of solid waste management to 2050. Washington: World Bank Group.</a:t>
-            </a:r>
-          </a:p>
-          <a:p>
-            <a:pPr marL="514350" indent="-514350" algn="just">
-              <a:lnSpc>
-                <a:spcPct val="220000"/>
-              </a:lnSpc>
-              <a:buFont typeface="+mj-lt"/>
-              <a:buAutoNum type="arabicPeriod"/>
-            </a:pPr>
-            <a:r>
-              <a:rPr lang="en-US" dirty="0">
-                <a:latin typeface="Times New Roman" panose="02020603050405020304" pitchFamily="18" charset="0"/>
-                <a:cs typeface="Times New Roman" panose="02020603050405020304" pitchFamily="18" charset="0"/>
-              </a:rPr>
-              <a:t>Knapik, J. J., Cosio-Lima, L. M. and Reynolds, K. L. (2015) 'Efficacy of functional movement screening for predicting injuries in coast guard cadets', The Journal of Strength and Conditioning Research, 29(5), pp. 1157-1162.</a:t>
-            </a:r>
-          </a:p>
-          <a:p>
-            <a:pPr marL="514350" indent="-514350" algn="just">
-              <a:lnSpc>
-                <a:spcPct val="220000"/>
-              </a:lnSpc>
-              <a:buFont typeface="+mj-lt"/>
-              <a:buAutoNum type="arabicPeriod"/>
-            </a:pPr>
-            <a:r>
-              <a:rPr lang="en-US" dirty="0">
-                <a:latin typeface="Times New Roman" panose="02020603050405020304" pitchFamily="18" charset="0"/>
-                <a:cs typeface="Times New Roman" panose="02020603050405020304" pitchFamily="18" charset="0"/>
-              </a:rPr>
-              <a:t>Lutz, M. (2013) Learning Python. 5th </a:t>
-            </a:r>
-            <a:r>
-              <a:rPr lang="en-US" dirty="0" err="1">
-                <a:latin typeface="Times New Roman" panose="02020603050405020304" pitchFamily="18" charset="0"/>
-                <a:cs typeface="Times New Roman" panose="02020603050405020304" pitchFamily="18" charset="0"/>
-              </a:rPr>
-              <a:t>edn</a:t>
-            </a:r>
-            <a:r>
-              <a:rPr lang="en-US" dirty="0">
-                <a:latin typeface="Times New Roman" panose="02020603050405020304" pitchFamily="18" charset="0"/>
-                <a:cs typeface="Times New Roman" panose="02020603050405020304" pitchFamily="18" charset="0"/>
-              </a:rPr>
-              <a:t>. Sebastopol: O'Reilly Media.</a:t>
-            </a:r>
-          </a:p>
-          <a:p>
-            <a:pPr marL="514350" indent="-514350" algn="just">
-              <a:lnSpc>
-                <a:spcPct val="220000"/>
-              </a:lnSpc>
-              <a:buFont typeface="+mj-lt"/>
-              <a:buAutoNum type="arabicPeriod"/>
-            </a:pPr>
-            <a:r>
-              <a:rPr lang="en-US" dirty="0">
-                <a:latin typeface="Times New Roman" panose="02020603050405020304" pitchFamily="18" charset="0"/>
-                <a:cs typeface="Times New Roman" panose="02020603050405020304" pitchFamily="18" charset="0"/>
-              </a:rPr>
-              <a:t>Matplotlib Development Team (2024) Matplotlib documentation. Available at: https://matplotlib.org/stable/ (Accessed: 12 March 2026).</a:t>
-            </a:r>
-          </a:p>
-          <a:p>
-            <a:pPr marL="514350" indent="-514350" algn="just">
-              <a:lnSpc>
-                <a:spcPct val="220000"/>
-              </a:lnSpc>
-              <a:buFont typeface="+mj-lt"/>
-              <a:buAutoNum type="arabicPeriod"/>
-            </a:pPr>
-            <a:r>
-              <a:rPr lang="en-US" dirty="0">
-                <a:latin typeface="Times New Roman" panose="02020603050405020304" pitchFamily="18" charset="0"/>
-                <a:cs typeface="Times New Roman" panose="02020603050405020304" pitchFamily="18" charset="0"/>
-              </a:rPr>
-              <a:t>Pahl, C. and Mani, N. (2014) 'Managing quality constraints in technology-managed learning content processes', in </a:t>
-            </a:r>
-            <a:r>
-              <a:rPr lang="en-US" dirty="0" err="1">
-                <a:latin typeface="Times New Roman" panose="02020603050405020304" pitchFamily="18" charset="0"/>
-                <a:cs typeface="Times New Roman" panose="02020603050405020304" pitchFamily="18" charset="0"/>
-              </a:rPr>
-              <a:t>EdMedia</a:t>
-            </a:r>
-            <a:r>
-              <a:rPr lang="en-US" dirty="0">
-                <a:latin typeface="Times New Roman" panose="02020603050405020304" pitchFamily="18" charset="0"/>
-                <a:cs typeface="Times New Roman" panose="02020603050405020304" pitchFamily="18" charset="0"/>
-              </a:rPr>
-              <a:t> 2014 World Conference on Educational Media and Technology, June 23-26, Tampere. Chesapeake: AACE, pp. 153-161.</a:t>
+              <a:t>The project successfully validates the feasibility of an affordable, offline-capable smart waste solution.</a:t>
             </a:r>
           </a:p>
         </p:txBody>
@@ -21504,9 +20874,133 @@
           </a:p>
         </p:txBody>
       </p:sp>
+      <p:sp>
+        <p:nvSpPr>
+          <p:cNvPr id="10" name="Slide Number Placeholder 3"/>
+          <p:cNvSpPr txBox="1">
+            <a:spLocks/>
+          </p:cNvSpPr>
+          <p:nvPr/>
+        </p:nvSpPr>
+        <p:spPr>
+          <a:xfrm>
+            <a:off x="1524000" y="6629400"/>
+            <a:ext cx="7696200" cy="228600"/>
+          </a:xfrm>
+          <a:prstGeom prst="rect">
+            <a:avLst/>
+          </a:prstGeom>
+        </p:spPr>
+        <p:txBody>
+          <a:bodyPr vert="horz" lIns="91440" tIns="45720" rIns="91440" bIns="45720" rtlCol="0" anchor="ctr"/>
+          <a:lstStyle/>
+          <a:p>
+            <a:pPr algn="ctr"/>
+            <a:r>
+              <a:rPr lang="en-US" sz="1200" b="1" dirty="0">
+                <a:latin typeface="Times New Roman" panose="02020603050405020304" pitchFamily="18" charset="0"/>
+                <a:cs typeface="Times New Roman" pitchFamily="18" charset="0"/>
+              </a:rPr>
+              <a:t>Smart Waste Management System (SWMS)</a:t>
+            </a:r>
+            <a:endParaRPr lang="en-US" sz="1200" dirty="0">
+              <a:latin typeface="Times New Roman" panose="02020603050405020304" pitchFamily="18" charset="0"/>
+              <a:cs typeface="Times New Roman" panose="02020603050405020304" pitchFamily="18" charset="0"/>
+            </a:endParaRPr>
+          </a:p>
+        </p:txBody>
+      </p:sp>
+      <p:sp>
+        <p:nvSpPr>
+          <p:cNvPr id="12" name="Title 1">
+            <a:extLst>
+              <a:ext uri="{FF2B5EF4-FFF2-40B4-BE49-F238E27FC236}">
+                <a16:creationId xmlns:a16="http://schemas.microsoft.com/office/drawing/2014/main" id="{9380301D-C2FB-CCEB-FB5A-5CBF636818D9}"/>
+              </a:ext>
+            </a:extLst>
+          </p:cNvPr>
+          <p:cNvSpPr>
+            <a:spLocks noGrp="1"/>
+          </p:cNvSpPr>
+          <p:nvPr>
+            <p:ph type="title"/>
+          </p:nvPr>
+        </p:nvSpPr>
+        <p:spPr>
+          <a:xfrm>
+            <a:off x="2133600" y="171857"/>
+            <a:ext cx="7924800" cy="457201"/>
+          </a:xfrm>
+        </p:spPr>
+        <p:txBody>
+          <a:bodyPr>
+            <a:noAutofit/>
+          </a:bodyPr>
+          <a:lstStyle/>
+          <a:p>
+            <a:pPr algn="ctr"/>
+            <a:br>
+              <a:rPr lang="en-US" sz="3200" b="1" dirty="0"/>
+            </a:br>
+            <a:br>
+              <a:rPr lang="en-US" sz="3200" b="1" dirty="0"/>
+            </a:br>
+            <a:br>
+              <a:rPr lang="en-US" sz="3200" b="1" dirty="0"/>
+            </a:br>
+            <a:br>
+              <a:rPr lang="en-US" sz="3200" b="1" dirty="0"/>
+            </a:br>
+            <a:br>
+              <a:rPr lang="en-US" sz="3200" b="1" dirty="0"/>
+            </a:br>
+            <a:br>
+              <a:rPr lang="en-US" sz="3200" b="1" dirty="0"/>
+            </a:br>
+            <a:br>
+              <a:rPr lang="en-US" sz="3200" b="1" dirty="0"/>
+            </a:br>
+            <a:br>
+              <a:rPr lang="en-US" sz="3200" b="1" dirty="0"/>
+            </a:br>
+            <a:br>
+              <a:rPr lang="en-US" sz="3200" b="1" dirty="0"/>
+            </a:br>
+            <a:br>
+              <a:rPr lang="en-US" sz="3200" b="1" dirty="0"/>
+            </a:br>
+            <a:r>
+              <a:rPr lang="en-US" sz="3200" b="1" dirty="0"/>
+              <a:t>                     </a:t>
+            </a:r>
+            <a:br>
+              <a:rPr lang="en-US" sz="3200" b="1" dirty="0"/>
+            </a:br>
+            <a:br>
+              <a:rPr lang="en-US" sz="3200" b="1" dirty="0"/>
+            </a:br>
+            <a:br>
+              <a:rPr lang="en-US" sz="3200" b="1" dirty="0"/>
+            </a:br>
+            <a:br>
+              <a:rPr lang="en-US" sz="3200" b="1" dirty="0"/>
+            </a:br>
+            <a:br>
+              <a:rPr lang="en-US" sz="3200" b="1" dirty="0"/>
+            </a:br>
+            <a:endParaRPr lang="en-US" sz="3200" b="1" dirty="0"/>
+          </a:p>
+        </p:txBody>
+      </p:sp>
       <p:pic>
         <p:nvPicPr>
-          <p:cNvPr id="9" name="Picture 4"/>
+          <p:cNvPr id="13" name="Picture 4">
+            <a:extLst>
+              <a:ext uri="{FF2B5EF4-FFF2-40B4-BE49-F238E27FC236}">
+                <a16:creationId xmlns:a16="http://schemas.microsoft.com/office/drawing/2014/main" id="{1DE960E5-FF35-9EDD-969F-C0694B5F1AAF}"/>
+              </a:ext>
+            </a:extLst>
+          </p:cNvPr>
           <p:cNvPicPr>
             <a:picLocks noChangeAspect="1" noChangeArrowheads="1"/>
           </p:cNvPicPr>
@@ -21521,7 +21015,7 @@
         </p:blipFill>
         <p:spPr bwMode="auto">
           <a:xfrm>
-            <a:off x="1575486" y="87062"/>
+            <a:off x="533400" y="91480"/>
             <a:ext cx="609600" cy="539014"/>
           </a:xfrm>
           <a:prstGeom prst="rect">
@@ -21537,9 +21031,67 @@
           <a:effectLst/>
         </p:spPr>
       </p:pic>
+      <p:sp>
+        <p:nvSpPr>
+          <p:cNvPr id="14" name="Title 1">
+            <a:extLst>
+              <a:ext uri="{FF2B5EF4-FFF2-40B4-BE49-F238E27FC236}">
+                <a16:creationId xmlns:a16="http://schemas.microsoft.com/office/drawing/2014/main" id="{9273AB02-C084-AA6E-F2F1-F54E1B680830}"/>
+              </a:ext>
+            </a:extLst>
+          </p:cNvPr>
+          <p:cNvSpPr txBox="1">
+            <a:spLocks/>
+          </p:cNvSpPr>
+          <p:nvPr/>
+        </p:nvSpPr>
+        <p:spPr>
+          <a:xfrm>
+            <a:off x="1880616" y="171856"/>
+            <a:ext cx="8046720" cy="457200"/>
+          </a:xfrm>
+          <a:prstGeom prst="rect">
+            <a:avLst/>
+          </a:prstGeom>
+        </p:spPr>
+        <p:txBody>
+          <a:bodyPr vert="horz" lIns="91440" tIns="45720" rIns="91440" bIns="45720" rtlCol="0" anchor="ctr">
+            <a:noAutofit/>
+          </a:bodyPr>
+          <a:lstStyle/>
+          <a:p>
+            <a:pPr algn="ctr">
+              <a:spcBef>
+                <a:spcPct val="0"/>
+              </a:spcBef>
+              <a:defRPr/>
+            </a:pPr>
+            <a:r>
+              <a:rPr lang="en-US" sz="3200" b="1" dirty="0">
+                <a:solidFill>
+                  <a:schemeClr val="tx1">
+                    <a:lumMod val="95000"/>
+                    <a:lumOff val="5000"/>
+                  </a:schemeClr>
+                </a:solidFill>
+                <a:latin typeface="+mj-lt"/>
+                <a:ea typeface="+mj-ea"/>
+                <a:cs typeface="+mj-cs"/>
+              </a:rPr>
+              <a:t>Conclusion</a:t>
+            </a:r>
+          </a:p>
+        </p:txBody>
+      </p:sp>
       <p:pic>
         <p:nvPicPr>
-          <p:cNvPr id="10" name="Picture 2"/>
+          <p:cNvPr id="15" name="Picture 2">
+            <a:extLst>
+              <a:ext uri="{FF2B5EF4-FFF2-40B4-BE49-F238E27FC236}">
+                <a16:creationId xmlns:a16="http://schemas.microsoft.com/office/drawing/2014/main" id="{02CF62C1-2383-F445-35E0-46DA1FB194D9}"/>
+              </a:ext>
+            </a:extLst>
+          </p:cNvPr>
           <p:cNvPicPr>
             <a:picLocks noChangeAspect="1" noChangeArrowheads="1"/>
           </p:cNvPicPr>
@@ -21554,7 +21106,7 @@
         </p:blipFill>
         <p:spPr bwMode="auto">
           <a:xfrm>
-            <a:off x="10031922" y="103094"/>
+            <a:off x="11100459" y="122550"/>
             <a:ext cx="483679" cy="506506"/>
           </a:xfrm>
           <a:prstGeom prst="rect">
@@ -21570,42 +21122,6 @@
           <a:effectLst/>
         </p:spPr>
       </p:pic>
-      <p:sp>
-        <p:nvSpPr>
-          <p:cNvPr id="11" name="Slide Number Placeholder 3"/>
-          <p:cNvSpPr txBox="1">
-            <a:spLocks/>
-          </p:cNvSpPr>
-          <p:nvPr/>
-        </p:nvSpPr>
-        <p:spPr>
-          <a:xfrm>
-            <a:off x="1524000" y="6629400"/>
-            <a:ext cx="7696200" cy="228600"/>
-          </a:xfrm>
-          <a:prstGeom prst="rect">
-            <a:avLst/>
-          </a:prstGeom>
-        </p:spPr>
-        <p:txBody>
-          <a:bodyPr vert="horz" lIns="91440" tIns="45720" rIns="91440" bIns="45720" rtlCol="0" anchor="ctr"/>
-          <a:lstStyle/>
-          <a:p>
-            <a:pPr algn="ctr"/>
-            <a:r>
-              <a:rPr lang="en-US" sz="1200" b="1" dirty="0">
-                <a:latin typeface="Times New Roman" panose="02020603050405020304" pitchFamily="18" charset="0"/>
-                <a:cs typeface="Times New Roman" pitchFamily="18" charset="0"/>
-              </a:rPr>
-              <a:t>Smart Waste Management System (SWMS)</a:t>
-            </a:r>
-            <a:endParaRPr lang="en-US" sz="1200" dirty="0">
-              <a:latin typeface="Times New Roman" panose="02020603050405020304" pitchFamily="18" charset="0"/>
-              <a:cs typeface="Times New Roman" panose="02020603050405020304" pitchFamily="18" charset="0"/>
-            </a:endParaRPr>
-          </a:p>
-        </p:txBody>
-      </p:sp>
     </p:spTree>
   </p:cSld>
   <p:clrMapOvr>
@@ -21633,6 +21149,492 @@
       </p:grpSpPr>
       <p:sp>
         <p:nvSpPr>
+          <p:cNvPr id="2" name="Title 1"/>
+          <p:cNvSpPr>
+            <a:spLocks noGrp="1"/>
+          </p:cNvSpPr>
+          <p:nvPr>
+            <p:ph type="title"/>
+          </p:nvPr>
+        </p:nvSpPr>
+        <p:spPr>
+          <a:xfrm>
+            <a:off x="2133600" y="152400"/>
+            <a:ext cx="7924800" cy="457200"/>
+          </a:xfrm>
+        </p:spPr>
+        <p:txBody>
+          <a:bodyPr>
+            <a:noAutofit/>
+          </a:bodyPr>
+          <a:lstStyle/>
+          <a:p>
+            <a:pPr algn="ctr"/>
+            <a:r>
+              <a:rPr lang="en-US" sz="3200" b="1" dirty="0"/>
+              <a:t>References</a:t>
+            </a:r>
+          </a:p>
+        </p:txBody>
+      </p:sp>
+      <p:sp>
+        <p:nvSpPr>
+          <p:cNvPr id="3" name="Content Placeholder 2"/>
+          <p:cNvSpPr>
+            <a:spLocks noGrp="1"/>
+          </p:cNvSpPr>
+          <p:nvPr>
+            <p:ph idx="1"/>
+          </p:nvPr>
+        </p:nvSpPr>
+        <p:spPr>
+          <a:xfrm>
+            <a:off x="1752600" y="762000"/>
+            <a:ext cx="8763000" cy="5791200"/>
+          </a:xfrm>
+        </p:spPr>
+        <p:txBody>
+          <a:bodyPr>
+            <a:normAutofit fontScale="32500" lnSpcReduction="20000"/>
+          </a:bodyPr>
+          <a:lstStyle/>
+          <a:p>
+            <a:pPr marL="514350" indent="-514350" algn="just">
+              <a:lnSpc>
+                <a:spcPct val="220000"/>
+              </a:lnSpc>
+              <a:buFont typeface="+mj-lt"/>
+              <a:buAutoNum type="arabicPeriod"/>
+            </a:pPr>
+            <a:r>
+              <a:rPr lang="en-US" dirty="0">
+                <a:latin typeface="Times New Roman" panose="02020603050405020304" pitchFamily="18" charset="0"/>
+                <a:cs typeface="Times New Roman" panose="02020603050405020304" pitchFamily="18" charset="0"/>
+              </a:rPr>
+              <a:t>Adedeji, O. and Wang, Z. (2019) 'Intelligent waste classification system using deep learning convolutional neural network', Procedia Manufacturing, 35, pp. 607-612. doi: 10.1016/j.promfg.2019.05.086</a:t>
+            </a:r>
+          </a:p>
+          <a:p>
+            <a:pPr marL="514350" indent="-514350" algn="just">
+              <a:lnSpc>
+                <a:spcPct val="220000"/>
+              </a:lnSpc>
+              <a:buFont typeface="+mj-lt"/>
+              <a:buAutoNum type="arabicPeriod"/>
+            </a:pPr>
+            <a:r>
+              <a:rPr lang="en-US" dirty="0">
+                <a:latin typeface="Times New Roman" panose="02020603050405020304" pitchFamily="18" charset="0"/>
+                <a:cs typeface="Times New Roman" panose="02020603050405020304" pitchFamily="18" charset="0"/>
+              </a:rPr>
+              <a:t>Banerjee, A. and Watson, T. F. (2011) Pickard's manual of operative dentistry. 9th </a:t>
+            </a:r>
+            <a:r>
+              <a:rPr lang="en-US" dirty="0" err="1">
+                <a:latin typeface="Times New Roman" panose="02020603050405020304" pitchFamily="18" charset="0"/>
+                <a:cs typeface="Times New Roman" panose="02020603050405020304" pitchFamily="18" charset="0"/>
+              </a:rPr>
+              <a:t>edn</a:t>
+            </a:r>
+            <a:r>
+              <a:rPr lang="en-US" dirty="0">
+                <a:latin typeface="Times New Roman" panose="02020603050405020304" pitchFamily="18" charset="0"/>
+                <a:cs typeface="Times New Roman" panose="02020603050405020304" pitchFamily="18" charset="0"/>
+              </a:rPr>
+              <a:t>. Oxford: Oxford University Press.</a:t>
+            </a:r>
+          </a:p>
+          <a:p>
+            <a:pPr marL="514350" indent="-514350" algn="just">
+              <a:lnSpc>
+                <a:spcPct val="220000"/>
+              </a:lnSpc>
+              <a:buFont typeface="+mj-lt"/>
+              <a:buAutoNum type="arabicPeriod"/>
+            </a:pPr>
+            <a:r>
+              <a:rPr lang="en-US" dirty="0">
+                <a:latin typeface="Times New Roman" panose="02020603050405020304" pitchFamily="18" charset="0"/>
+                <a:cs typeface="Times New Roman" panose="02020603050405020304" pitchFamily="18" charset="0"/>
+              </a:rPr>
+              <a:t>Beazley, D. and Jones, B. K. (2013) Python cookbook. 3rd </a:t>
+            </a:r>
+            <a:r>
+              <a:rPr lang="en-US" dirty="0" err="1">
+                <a:latin typeface="Times New Roman" panose="02020603050405020304" pitchFamily="18" charset="0"/>
+                <a:cs typeface="Times New Roman" panose="02020603050405020304" pitchFamily="18" charset="0"/>
+              </a:rPr>
+              <a:t>edn</a:t>
+            </a:r>
+            <a:r>
+              <a:rPr lang="en-US" dirty="0">
+                <a:latin typeface="Times New Roman" panose="02020603050405020304" pitchFamily="18" charset="0"/>
+                <a:cs typeface="Times New Roman" panose="02020603050405020304" pitchFamily="18" charset="0"/>
+              </a:rPr>
+              <a:t>. Sebastopol: O'Reilly Media.</a:t>
+            </a:r>
+          </a:p>
+          <a:p>
+            <a:pPr marL="514350" indent="-514350" algn="just">
+              <a:lnSpc>
+                <a:spcPct val="220000"/>
+              </a:lnSpc>
+              <a:buFont typeface="+mj-lt"/>
+              <a:buAutoNum type="arabicPeriod"/>
+            </a:pPr>
+            <a:r>
+              <a:rPr lang="en-US" dirty="0" err="1">
+                <a:latin typeface="Times New Roman" panose="02020603050405020304" pitchFamily="18" charset="0"/>
+                <a:cs typeface="Times New Roman" panose="02020603050405020304" pitchFamily="18" charset="0"/>
+              </a:rPr>
+              <a:t>Bushnag</a:t>
+            </a:r>
+            <a:r>
+              <a:rPr lang="en-US" dirty="0">
+                <a:latin typeface="Times New Roman" panose="02020603050405020304" pitchFamily="18" charset="0"/>
+                <a:cs typeface="Times New Roman" panose="02020603050405020304" pitchFamily="18" charset="0"/>
+              </a:rPr>
+              <a:t>, A. (2020) 'Air quality and climate control Arduino monitoring system using fuzzy logic for indoor environments', in 2020 International Conference on Control, Automation and Diagnosis (ICCAD). IEEE, pp. 1-6. doi: 10.1109/ICCAD49821.2020.9260552</a:t>
+            </a:r>
+          </a:p>
+          <a:p>
+            <a:pPr marL="514350" indent="-514350" algn="just">
+              <a:lnSpc>
+                <a:spcPct val="220000"/>
+              </a:lnSpc>
+              <a:buFont typeface="+mj-lt"/>
+              <a:buAutoNum type="arabicPeriod"/>
+            </a:pPr>
+            <a:r>
+              <a:rPr lang="en-US" dirty="0">
+                <a:latin typeface="Times New Roman" panose="02020603050405020304" pitchFamily="18" charset="0"/>
+                <a:cs typeface="Times New Roman" panose="02020603050405020304" pitchFamily="18" charset="0"/>
+              </a:rPr>
+              <a:t>Department of Environment, Bangladesh (2021) State of solid waste management in Bangladesh: 2021 status report. Dhaka: Government of Bangladesh.</a:t>
+            </a:r>
+          </a:p>
+          <a:p>
+            <a:pPr marL="514350" indent="-514350" algn="just">
+              <a:lnSpc>
+                <a:spcPct val="220000"/>
+              </a:lnSpc>
+              <a:buFont typeface="+mj-lt"/>
+              <a:buAutoNum type="arabicPeriod"/>
+            </a:pPr>
+            <a:r>
+              <a:rPr lang="en-US" dirty="0">
+                <a:latin typeface="Times New Roman" panose="02020603050405020304" pitchFamily="18" charset="0"/>
+                <a:cs typeface="Times New Roman" panose="02020603050405020304" pitchFamily="18" charset="0"/>
+              </a:rPr>
+              <a:t>Hossain, M. S. and Rahman, A. (2020) 'A study on solid waste management in Dhaka city', Journal of Environmental Science and Sustainable Development, 3(2), pp. 45-58.</a:t>
+            </a:r>
+          </a:p>
+          <a:p>
+            <a:pPr marL="514350" indent="-514350" algn="just">
+              <a:lnSpc>
+                <a:spcPct val="220000"/>
+              </a:lnSpc>
+              <a:buFont typeface="+mj-lt"/>
+              <a:buAutoNum type="arabicPeriod"/>
+            </a:pPr>
+            <a:r>
+              <a:rPr lang="en-US" dirty="0">
+                <a:latin typeface="Times New Roman" panose="02020603050405020304" pitchFamily="18" charset="0"/>
+                <a:cs typeface="Times New Roman" panose="02020603050405020304" pitchFamily="18" charset="0"/>
+              </a:rPr>
+              <a:t>Kaza, S., Yao, L., </a:t>
+            </a:r>
+            <a:r>
+              <a:rPr lang="en-US" dirty="0" err="1">
+                <a:latin typeface="Times New Roman" panose="02020603050405020304" pitchFamily="18" charset="0"/>
+                <a:cs typeface="Times New Roman" panose="02020603050405020304" pitchFamily="18" charset="0"/>
+              </a:rPr>
+              <a:t>Bhada</a:t>
+            </a:r>
+            <a:r>
+              <a:rPr lang="en-US" dirty="0">
+                <a:latin typeface="Times New Roman" panose="02020603050405020304" pitchFamily="18" charset="0"/>
+                <a:cs typeface="Times New Roman" panose="02020603050405020304" pitchFamily="18" charset="0"/>
+              </a:rPr>
+              <a:t>-Tata, P. and Van </a:t>
+            </a:r>
+            <a:r>
+              <a:rPr lang="en-US" dirty="0" err="1">
+                <a:latin typeface="Times New Roman" panose="02020603050405020304" pitchFamily="18" charset="0"/>
+                <a:cs typeface="Times New Roman" panose="02020603050405020304" pitchFamily="18" charset="0"/>
+              </a:rPr>
+              <a:t>Woerden</a:t>
+            </a:r>
+            <a:r>
+              <a:rPr lang="en-US" dirty="0">
+                <a:latin typeface="Times New Roman" panose="02020603050405020304" pitchFamily="18" charset="0"/>
+                <a:cs typeface="Times New Roman" panose="02020603050405020304" pitchFamily="18" charset="0"/>
+              </a:rPr>
+              <a:t>, F. (2018) What a Waste 2.0: A global snapshot of solid waste management to 2050. Washington: World Bank Group.</a:t>
+            </a:r>
+          </a:p>
+          <a:p>
+            <a:pPr marL="514350" indent="-514350" algn="just">
+              <a:lnSpc>
+                <a:spcPct val="220000"/>
+              </a:lnSpc>
+              <a:buFont typeface="+mj-lt"/>
+              <a:buAutoNum type="arabicPeriod"/>
+            </a:pPr>
+            <a:r>
+              <a:rPr lang="en-US" dirty="0">
+                <a:latin typeface="Times New Roman" panose="02020603050405020304" pitchFamily="18" charset="0"/>
+                <a:cs typeface="Times New Roman" panose="02020603050405020304" pitchFamily="18" charset="0"/>
+              </a:rPr>
+              <a:t>Knapik, J. J., Cosio-Lima, L. M. and Reynolds, K. L. (2015) 'Efficacy of functional movement screening for predicting injuries in coast guard cadets', The Journal of Strength and Conditioning Research, 29(5), pp. 1157-1162.</a:t>
+            </a:r>
+          </a:p>
+          <a:p>
+            <a:pPr marL="514350" indent="-514350" algn="just">
+              <a:lnSpc>
+                <a:spcPct val="220000"/>
+              </a:lnSpc>
+              <a:buFont typeface="+mj-lt"/>
+              <a:buAutoNum type="arabicPeriod"/>
+            </a:pPr>
+            <a:r>
+              <a:rPr lang="en-US" dirty="0">
+                <a:latin typeface="Times New Roman" panose="02020603050405020304" pitchFamily="18" charset="0"/>
+                <a:cs typeface="Times New Roman" panose="02020603050405020304" pitchFamily="18" charset="0"/>
+              </a:rPr>
+              <a:t>Lutz, M. (2013) Learning Python. 5th </a:t>
+            </a:r>
+            <a:r>
+              <a:rPr lang="en-US" dirty="0" err="1">
+                <a:latin typeface="Times New Roman" panose="02020603050405020304" pitchFamily="18" charset="0"/>
+                <a:cs typeface="Times New Roman" panose="02020603050405020304" pitchFamily="18" charset="0"/>
+              </a:rPr>
+              <a:t>edn</a:t>
+            </a:r>
+            <a:r>
+              <a:rPr lang="en-US" dirty="0">
+                <a:latin typeface="Times New Roman" panose="02020603050405020304" pitchFamily="18" charset="0"/>
+                <a:cs typeface="Times New Roman" panose="02020603050405020304" pitchFamily="18" charset="0"/>
+              </a:rPr>
+              <a:t>. Sebastopol: O'Reilly Media.</a:t>
+            </a:r>
+          </a:p>
+          <a:p>
+            <a:pPr marL="514350" indent="-514350" algn="just">
+              <a:lnSpc>
+                <a:spcPct val="220000"/>
+              </a:lnSpc>
+              <a:buFont typeface="+mj-lt"/>
+              <a:buAutoNum type="arabicPeriod"/>
+            </a:pPr>
+            <a:r>
+              <a:rPr lang="en-US" dirty="0">
+                <a:latin typeface="Times New Roman" panose="02020603050405020304" pitchFamily="18" charset="0"/>
+                <a:cs typeface="Times New Roman" panose="02020603050405020304" pitchFamily="18" charset="0"/>
+              </a:rPr>
+              <a:t>Matplotlib Development Team (2024) Matplotlib documentation. Available at: https://matplotlib.org/stable/ (Accessed: 12 March 2026).</a:t>
+            </a:r>
+          </a:p>
+          <a:p>
+            <a:pPr marL="514350" indent="-514350" algn="just">
+              <a:lnSpc>
+                <a:spcPct val="220000"/>
+              </a:lnSpc>
+              <a:buFont typeface="+mj-lt"/>
+              <a:buAutoNum type="arabicPeriod"/>
+            </a:pPr>
+            <a:r>
+              <a:rPr lang="en-US" dirty="0">
+                <a:latin typeface="Times New Roman" panose="02020603050405020304" pitchFamily="18" charset="0"/>
+                <a:cs typeface="Times New Roman" panose="02020603050405020304" pitchFamily="18" charset="0"/>
+              </a:rPr>
+              <a:t>Pahl, C. and Mani, N. (2014) 'Managing quality constraints in technology-managed learning content processes', in </a:t>
+            </a:r>
+            <a:r>
+              <a:rPr lang="en-US" dirty="0" err="1">
+                <a:latin typeface="Times New Roman" panose="02020603050405020304" pitchFamily="18" charset="0"/>
+                <a:cs typeface="Times New Roman" panose="02020603050405020304" pitchFamily="18" charset="0"/>
+              </a:rPr>
+              <a:t>EdMedia</a:t>
+            </a:r>
+            <a:r>
+              <a:rPr lang="en-US" dirty="0">
+                <a:latin typeface="Times New Roman" panose="02020603050405020304" pitchFamily="18" charset="0"/>
+                <a:cs typeface="Times New Roman" panose="02020603050405020304" pitchFamily="18" charset="0"/>
+              </a:rPr>
+              <a:t> 2014 World Conference on Educational Media and Technology, June 23-26, Tampere. Chesapeake: AACE, pp. 153-161.</a:t>
+            </a:r>
+          </a:p>
+        </p:txBody>
+      </p:sp>
+      <p:sp>
+        <p:nvSpPr>
+          <p:cNvPr id="6" name="Slide Number Placeholder 3"/>
+          <p:cNvSpPr txBox="1">
+            <a:spLocks/>
+          </p:cNvSpPr>
+          <p:nvPr/>
+        </p:nvSpPr>
+        <p:spPr>
+          <a:xfrm>
+            <a:off x="8534400" y="6629400"/>
+            <a:ext cx="2133600" cy="228600"/>
+          </a:xfrm>
+          <a:prstGeom prst="rect">
+            <a:avLst/>
+          </a:prstGeom>
+        </p:spPr>
+        <p:txBody>
+          <a:bodyPr vert="horz" lIns="91440" tIns="45720" rIns="91440" bIns="45720" rtlCol="0" anchor="ctr"/>
+          <a:lstStyle/>
+          <a:p>
+            <a:pPr algn="r">
+              <a:defRPr/>
+            </a:pPr>
+            <a:fld id="{B6F15528-21DE-4FAA-801E-634DDDAF4B2B}" type="slidenum">
+              <a:rPr lang="en-US" sz="1200">
+                <a:latin typeface="Rockwell" pitchFamily="18" charset="0"/>
+              </a:rPr>
+              <a:pPr algn="r">
+                <a:defRPr/>
+              </a:pPr>
+              <a:t>47</a:t>
+            </a:fld>
+            <a:endParaRPr lang="en-US" sz="1200" dirty="0">
+              <a:latin typeface="Rockwell" pitchFamily="18" charset="0"/>
+            </a:endParaRPr>
+          </a:p>
+        </p:txBody>
+      </p:sp>
+      <p:pic>
+        <p:nvPicPr>
+          <p:cNvPr id="9" name="Picture 4"/>
+          <p:cNvPicPr>
+            <a:picLocks noChangeAspect="1" noChangeArrowheads="1"/>
+          </p:cNvPicPr>
+          <p:nvPr/>
+        </p:nvPicPr>
+        <p:blipFill>
+          <a:blip r:embed="rId2"/>
+          <a:srcRect/>
+          <a:stretch>
+            <a:fillRect/>
+          </a:stretch>
+        </p:blipFill>
+        <p:spPr bwMode="auto">
+          <a:xfrm>
+            <a:off x="1575486" y="87062"/>
+            <a:ext cx="609600" cy="539014"/>
+          </a:xfrm>
+          <a:prstGeom prst="rect">
+            <a:avLst/>
+          </a:prstGeom>
+          <a:noFill/>
+          <a:ln w="9525">
+            <a:noFill/>
+            <a:miter lim="800000"/>
+            <a:headEnd/>
+            <a:tailEnd/>
+          </a:ln>
+          <a:effectLst/>
+        </p:spPr>
+      </p:pic>
+      <p:pic>
+        <p:nvPicPr>
+          <p:cNvPr id="10" name="Picture 2"/>
+          <p:cNvPicPr>
+            <a:picLocks noChangeAspect="1" noChangeArrowheads="1"/>
+          </p:cNvPicPr>
+          <p:nvPr/>
+        </p:nvPicPr>
+        <p:blipFill>
+          <a:blip r:embed="rId3" cstate="print"/>
+          <a:srcRect/>
+          <a:stretch>
+            <a:fillRect/>
+          </a:stretch>
+        </p:blipFill>
+        <p:spPr bwMode="auto">
+          <a:xfrm>
+            <a:off x="10031922" y="103094"/>
+            <a:ext cx="483679" cy="506506"/>
+          </a:xfrm>
+          <a:prstGeom prst="rect">
+            <a:avLst/>
+          </a:prstGeom>
+          <a:noFill/>
+          <a:ln w="9525">
+            <a:noFill/>
+            <a:miter lim="800000"/>
+            <a:headEnd/>
+            <a:tailEnd/>
+          </a:ln>
+          <a:effectLst/>
+        </p:spPr>
+      </p:pic>
+      <p:sp>
+        <p:nvSpPr>
+          <p:cNvPr id="11" name="Slide Number Placeholder 3"/>
+          <p:cNvSpPr txBox="1">
+            <a:spLocks/>
+          </p:cNvSpPr>
+          <p:nvPr/>
+        </p:nvSpPr>
+        <p:spPr>
+          <a:xfrm>
+            <a:off x="1524000" y="6629400"/>
+            <a:ext cx="7696200" cy="228600"/>
+          </a:xfrm>
+          <a:prstGeom prst="rect">
+            <a:avLst/>
+          </a:prstGeom>
+        </p:spPr>
+        <p:txBody>
+          <a:bodyPr vert="horz" lIns="91440" tIns="45720" rIns="91440" bIns="45720" rtlCol="0" anchor="ctr"/>
+          <a:lstStyle/>
+          <a:p>
+            <a:pPr algn="ctr"/>
+            <a:r>
+              <a:rPr lang="en-US" sz="1200" b="1" dirty="0">
+                <a:latin typeface="Times New Roman" panose="02020603050405020304" pitchFamily="18" charset="0"/>
+                <a:cs typeface="Times New Roman" pitchFamily="18" charset="0"/>
+              </a:rPr>
+              <a:t>Smart Waste Management System (SWMS)</a:t>
+            </a:r>
+            <a:endParaRPr lang="en-US" sz="1200" dirty="0">
+              <a:latin typeface="Times New Roman" panose="02020603050405020304" pitchFamily="18" charset="0"/>
+              <a:cs typeface="Times New Roman" panose="02020603050405020304" pitchFamily="18" charset="0"/>
+            </a:endParaRPr>
+          </a:p>
+        </p:txBody>
+      </p:sp>
+    </p:spTree>
+  </p:cSld>
+  <p:clrMapOvr>
+    <a:masterClrMapping/>
+  </p:clrMapOvr>
+</p:sld>
+</file>
+
+<file path=ppt/slides/slide48.xml><?xml version="1.0" encoding="utf-8"?>
+<p:sld xmlns:a="http://schemas.openxmlformats.org/drawingml/2006/main" xmlns:r="http://schemas.openxmlformats.org/officeDocument/2006/relationships" xmlns:p="http://schemas.openxmlformats.org/presentationml/2006/main">
+  <p:cSld>
+    <p:spTree>
+      <p:nvGrpSpPr>
+        <p:cNvPr id="1" name=""/>
+        <p:cNvGrpSpPr/>
+        <p:nvPr/>
+      </p:nvGrpSpPr>
+      <p:grpSpPr>
+        <a:xfrm>
+          <a:off x="0" y="0"/>
+          <a:ext cx="0" cy="0"/>
+          <a:chOff x="0" y="0"/>
+          <a:chExt cx="0" cy="0"/>
+        </a:xfrm>
+      </p:grpSpPr>
+      <p:sp>
+        <p:nvSpPr>
           <p:cNvPr id="6" name="Title 5">
             <a:extLst>
               <a:ext uri="{FF2B5EF4-FFF2-40B4-BE49-F238E27FC236}">
@@ -21682,7 +21684,7 @@
 </p:sld>
 </file>
 
-<file path=ppt/slides/slide48.xml><?xml version="1.0" encoding="utf-8"?>
+<file path=ppt/slides/slide49.xml><?xml version="1.0" encoding="utf-8"?>
 <p:sld xmlns:a="http://schemas.openxmlformats.org/drawingml/2006/main" xmlns:r="http://schemas.openxmlformats.org/officeDocument/2006/relationships" xmlns:p="http://schemas.openxmlformats.org/presentationml/2006/main">
   <p:cSld>
     <p:spTree>

--- a/Documents/Mock Presentaion.pptx
+++ b/Documents/Mock Presentaion.pptx
@@ -6023,12 +6023,50 @@
           </a:p>
         </p:txBody>
       </p:sp>
+      <p:sp>
+        <p:nvSpPr>
+          <p:cNvPr id="6" name="TextBox 5">
+            <a:extLst>
+              <a:ext uri="{FF2B5EF4-FFF2-40B4-BE49-F238E27FC236}">
+                <a16:creationId xmlns:a16="http://schemas.microsoft.com/office/drawing/2014/main" id="{FF093392-E314-3ABE-42A9-FE9AA7E86E56}"/>
+              </a:ext>
+            </a:extLst>
+          </p:cNvPr>
+          <p:cNvSpPr txBox="1"/>
+          <p:nvPr/>
+        </p:nvSpPr>
+        <p:spPr>
+          <a:xfrm>
+            <a:off x="4933998" y="6228942"/>
+            <a:ext cx="1939955" cy="276999"/>
+          </a:xfrm>
+          <a:prstGeom prst="rect">
+            <a:avLst/>
+          </a:prstGeom>
+          <a:noFill/>
+        </p:spPr>
+        <p:txBody>
+          <a:bodyPr wrap="none" rtlCol="0">
+            <a:spAutoFit/>
+          </a:bodyPr>
+          <a:lstStyle/>
+          <a:p>
+            <a:r>
+              <a:rPr lang="en-US" sz="1200" dirty="0">
+                <a:latin typeface="Times New Roman" panose="02020603050405020304" pitchFamily="18" charset="0"/>
+                <a:cs typeface="Times New Roman" panose="02020603050405020304" pitchFamily="18" charset="0"/>
+              </a:rPr>
+              <a:t>Figure 2: Use Case Diagram</a:t>
+            </a:r>
+          </a:p>
+        </p:txBody>
+      </p:sp>
       <p:pic>
         <p:nvPicPr>
-          <p:cNvPr id="5" name="Picture 4">
-            <a:extLst>
-              <a:ext uri="{FF2B5EF4-FFF2-40B4-BE49-F238E27FC236}">
-                <a16:creationId xmlns:a16="http://schemas.microsoft.com/office/drawing/2014/main" id="{3F6E0033-DD0A-F714-406E-C5A589B78B7F}"/>
+          <p:cNvPr id="4" name="Picture 3">
+            <a:extLst>
+              <a:ext uri="{FF2B5EF4-FFF2-40B4-BE49-F238E27FC236}">
+                <a16:creationId xmlns:a16="http://schemas.microsoft.com/office/drawing/2014/main" id="{20B35F20-7A36-8DAF-6878-967DE7885BC2}"/>
               </a:ext>
             </a:extLst>
           </p:cNvPr>
@@ -6051,52 +6089,14 @@
         </p:blipFill>
         <p:spPr>
           <a:xfrm>
-            <a:off x="3140450" y="731825"/>
-            <a:ext cx="5527052" cy="5394350"/>
+            <a:off x="1992111" y="666761"/>
+            <a:ext cx="8207778" cy="5971968"/>
           </a:xfrm>
           <a:prstGeom prst="rect">
             <a:avLst/>
           </a:prstGeom>
         </p:spPr>
       </p:pic>
-      <p:sp>
-        <p:nvSpPr>
-          <p:cNvPr id="6" name="TextBox 5">
-            <a:extLst>
-              <a:ext uri="{FF2B5EF4-FFF2-40B4-BE49-F238E27FC236}">
-                <a16:creationId xmlns:a16="http://schemas.microsoft.com/office/drawing/2014/main" id="{FF093392-E314-3ABE-42A9-FE9AA7E86E56}"/>
-              </a:ext>
-            </a:extLst>
-          </p:cNvPr>
-          <p:cNvSpPr txBox="1"/>
-          <p:nvPr/>
-        </p:nvSpPr>
-        <p:spPr>
-          <a:xfrm>
-            <a:off x="4933998" y="6228942"/>
-            <a:ext cx="1939955" cy="276999"/>
-          </a:xfrm>
-          <a:prstGeom prst="rect">
-            <a:avLst/>
-          </a:prstGeom>
-          <a:noFill/>
-        </p:spPr>
-        <p:txBody>
-          <a:bodyPr wrap="none" rtlCol="0">
-            <a:spAutoFit/>
-          </a:bodyPr>
-          <a:lstStyle/>
-          <a:p>
-            <a:r>
-              <a:rPr lang="en-US" sz="1200" dirty="0">
-                <a:latin typeface="Times New Roman" panose="02020603050405020304" pitchFamily="18" charset="0"/>
-                <a:cs typeface="Times New Roman" panose="02020603050405020304" pitchFamily="18" charset="0"/>
-              </a:rPr>
-              <a:t>Figure 2: Use Case Diagram</a:t>
-            </a:r>
-          </a:p>
-        </p:txBody>
-      </p:sp>
     </p:spTree>
     <p:extLst>
       <p:ext uri="{BB962C8B-B14F-4D97-AF65-F5344CB8AC3E}">
@@ -12575,7 +12575,7 @@
         </p:nvSpPr>
         <p:spPr>
           <a:xfrm>
-            <a:off x="5250256" y="6145549"/>
+            <a:off x="5250255" y="6306827"/>
             <a:ext cx="1691490" cy="276999"/>
           </a:xfrm>
           <a:prstGeom prst="rect">
@@ -12602,10 +12602,10 @@
       </p:sp>
       <p:pic>
         <p:nvPicPr>
-          <p:cNvPr id="4" name="Picture 3">
-            <a:extLst>
-              <a:ext uri="{FF2B5EF4-FFF2-40B4-BE49-F238E27FC236}">
-                <a16:creationId xmlns:a16="http://schemas.microsoft.com/office/drawing/2014/main" id="{4F6D9912-32A6-0B2C-8CD1-8AEF09C7E0A1}"/>
+          <p:cNvPr id="5" name="Picture 4">
+            <a:extLst>
+              <a:ext uri="{FF2B5EF4-FFF2-40B4-BE49-F238E27FC236}">
+                <a16:creationId xmlns:a16="http://schemas.microsoft.com/office/drawing/2014/main" id="{2A42F65E-50F7-23F9-9381-18B2C01D3F7E}"/>
               </a:ext>
             </a:extLst>
           </p:cNvPr>
@@ -12622,13 +12622,14 @@
               </a:ext>
             </a:extLst>
           </a:blip>
-          <a:srcRect/>
-          <a:stretch/>
+          <a:stretch>
+            <a:fillRect/>
+          </a:stretch>
         </p:blipFill>
         <p:spPr>
           <a:xfrm>
-            <a:off x="2971800" y="192494"/>
-            <a:ext cx="6529187" cy="5584018"/>
+            <a:off x="1429663" y="98650"/>
+            <a:ext cx="9233672" cy="6185398"/>
           </a:xfrm>
           <a:prstGeom prst="rect">
             <a:avLst/>
